--- a/dist/초1/수학/수와연산/초1_수학_수와연산_04_덧셈의뜻_학생용.pptx
+++ b/dist/초1/수학/수와연산/초1_수학_수와연산_04_덧셈의뜻_학생용.pptx
@@ -119,13 +119,13 @@
   <p:extLst>
     <p:ext uri="{521415D9-36F7-43E2-AB2F-B90AF26B5E84}">
       <p14:sectionLst xmlns:p14="http://schemas.microsoft.com/office/powerpoint/2010/main">
-        <p14:section name="도입" id="{c7fbca9b-91f2-0022-549c-9a3fe1852283}">
+        <p14:section name="도입" id="{fedad11f-4ba1-b62b-6d3b-4b6112694eef}">
           <p14:sldIdLst>
             <p14:sldId id="256"/>
             <p14:sldId id="257"/>
           </p14:sldIdLst>
         </p14:section>
-        <p14:section name="개념" id="{907e821e-509b-a689-67a3-b78385f6aec8}">
+        <p14:section name="개념" id="{311e3316-1b65-00e2-d182-9ee0e98ac1e7}">
           <p14:sldIdLst>
             <p14:sldId id="258"/>
             <p14:sldId id="259"/>
@@ -133,25 +133,25 @@
             <p14:sldId id="261"/>
           </p14:sldIdLst>
         </p14:section>
-        <p14:section name="연습" id="{ecc4fba7-7238-a9dd-ce6d-d895053f196f}">
+        <p14:section name="연습" id="{16ec07b4-3e8d-f937-b604-a446353282c5}">
           <p14:sldIdLst>
             <p14:sldId id="262"/>
             <p14:sldId id="263"/>
             <p14:sldId id="264"/>
           </p14:sldIdLst>
         </p14:section>
-        <p14:section name="확인" id="{c1883715-ef9e-ef67-569b-802d44f22ddc}">
+        <p14:section name="확인" id="{349db59c-80bf-8dae-4005-f5577f5a578b}">
           <p14:sldIdLst>
             <p14:sldId id="265"/>
             <p14:sldId id="266"/>
           </p14:sldIdLst>
         </p14:section>
-        <p14:section name="정리" id="{c9164116-efea-2f82-d32e-7673f6afc896}">
+        <p14:section name="정리" id="{dd264d6c-fa0d-d123-b4dc-355c9c7071be}">
           <p14:sldIdLst>
             <p14:sldId id="267"/>
           </p14:sldIdLst>
         </p14:section>
-        <p14:section name="보충" id="{db3446a5-605c-8944-14db-34d55c0f6cb0}">
+        <p14:section name="보충" id="{0afcec30-8b8f-e4be-6aac-ecdbb552992e}">
           <p14:sldIdLst>
             <p14:sldId id="268"/>
           </p14:sldIdLst>
@@ -2695,7 +2695,7 @@
           <a:bodyPr wrap="square" lIns="0" tIns="0" rIns="0" bIns="0" rtlCol="0" anchor="ctr"/>
           <a:lstStyle/>
           <a:p>
-            <a:pPr algn="l" indent="0" marL="0">
+            <a:pPr eaLnBrk="0" algn="l" indent="0" marL="0">
               <a:buNone/>
             </a:pPr>
             <a:r>
@@ -2736,7 +2736,7 @@
           <a:bodyPr wrap="square" lIns="0" tIns="0" rIns="0" bIns="0" rtlCol="0" anchor="t"/>
           <a:lstStyle/>
           <a:p>
-            <a:pPr indent="0" marL="0">
+            <a:pPr eaLnBrk="0" indent="0" marL="0">
               <a:buNone/>
             </a:pPr>
             <a:r>
@@ -2985,7 +2985,7 @@
           <a:bodyPr wrap="square" lIns="0" tIns="0" rIns="0" bIns="0" rtlCol="0" anchor="ctr"/>
           <a:lstStyle/>
           <a:p>
-            <a:pPr indent="0" marL="0">
+            <a:pPr eaLnBrk="0" indent="0" marL="0">
               <a:spcAft>
                 <a:spcPts val="600"/>
               </a:spcAft>
@@ -3005,7 +3005,7 @@
             <a:endParaRPr lang="ko-KR" sz="3200" dirty="0"/>
           </a:p>
           <a:p>
-            <a:pPr indent="0" marL="0">
+            <a:pPr eaLnBrk="0" indent="0" marL="0">
               <a:spcAft>
                 <a:spcPts val="600"/>
               </a:spcAft>
@@ -3025,7 +3025,7 @@
             <a:endParaRPr lang="ko-KR" sz="3200" dirty="0"/>
           </a:p>
           <a:p>
-            <a:pPr indent="0" marL="0">
+            <a:pPr eaLnBrk="0" indent="0" marL="0">
               <a:spcAft>
                 <a:spcPts val="600"/>
               </a:spcAft>
@@ -3094,7 +3094,7 @@
           <a:bodyPr wrap="square" lIns="0" tIns="0" rIns="0" bIns="0" rtlCol="0" anchor="ctr"/>
           <a:lstStyle/>
           <a:p>
-            <a:pPr algn="l" indent="0" marL="0">
+            <a:pPr eaLnBrk="0" algn="l" indent="0" marL="0">
               <a:buNone/>
             </a:pPr>
             <a:r>
@@ -3133,7 +3133,7 @@
           <a:bodyPr wrap="square" lIns="0" tIns="0" rIns="0" bIns="0" rtlCol="0" anchor="ctr"/>
           <a:lstStyle/>
           <a:p>
-            <a:pPr algn="l" indent="0" marL="0">
+            <a:pPr eaLnBrk="0" algn="l" indent="0" marL="0">
               <a:buNone/>
             </a:pPr>
             <a:r>
@@ -3180,7 +3180,7 @@
           <a:bodyPr wrap="square" lIns="0" tIns="0" rIns="0" bIns="0" rtlCol="0" anchor="ctr"/>
           <a:lstStyle/>
           <a:p>
-            <a:pPr algn="ctr" indent="0" marL="0">
+            <a:pPr eaLnBrk="0" algn="ctr" indent="0" marL="0">
               <a:buNone/>
             </a:pPr>
             <a:r>
@@ -3219,7 +3219,7 @@
           <a:bodyPr wrap="square" lIns="0" tIns="0" rIns="0" bIns="0" rtlCol="0" anchor="ctr"/>
           <a:lstStyle/>
           <a:p>
-            <a:pPr algn="l" indent="0" marL="0">
+            <a:pPr eaLnBrk="0" algn="l" indent="0" marL="0">
               <a:buNone/>
             </a:pPr>
             <a:r>
@@ -3266,7 +3266,7 @@
           <a:bodyPr wrap="square" lIns="0" tIns="0" rIns="0" bIns="0" rtlCol="0" anchor="ctr"/>
           <a:lstStyle/>
           <a:p>
-            <a:pPr algn="ctr" indent="0" marL="0">
+            <a:pPr eaLnBrk="0" algn="ctr" indent="0" marL="0">
               <a:buNone/>
             </a:pPr>
             <a:r>
@@ -3305,7 +3305,7 @@
           <a:bodyPr wrap="square" lIns="0" tIns="0" rIns="0" bIns="0" rtlCol="0" anchor="ctr"/>
           <a:lstStyle/>
           <a:p>
-            <a:pPr algn="l" indent="0" marL="0">
+            <a:pPr eaLnBrk="0" algn="l" indent="0" marL="0">
               <a:buNone/>
             </a:pPr>
             <a:r>
@@ -3352,7 +3352,7 @@
           <a:bodyPr wrap="square" lIns="0" tIns="0" rIns="0" bIns="0" rtlCol="0" anchor="ctr"/>
           <a:lstStyle/>
           <a:p>
-            <a:pPr algn="ctr" indent="0" marL="0">
+            <a:pPr eaLnBrk="0" algn="ctr" indent="0" marL="0">
               <a:buNone/>
             </a:pPr>
             <a:r>
@@ -3391,7 +3391,7 @@
           <a:bodyPr wrap="square" lIns="0" tIns="0" rIns="0" bIns="0" rtlCol="0" anchor="ctr"/>
           <a:lstStyle/>
           <a:p>
-            <a:pPr algn="l" indent="0" marL="0">
+            <a:pPr eaLnBrk="0" algn="l" indent="0" marL="0">
               <a:buNone/>
             </a:pPr>
             <a:r>
@@ -3448,7 +3448,7 @@
             </a:lvl1pPr>
           </a:lstStyle>
           <a:p>
-            <a:pPr algn="r"/>
+            <a:pPr eaLnBrk="0" algn="r"/>
             <a:fld id="{F7021451-1387-4CA6-816F-3879F97B5CBC}" type="slidenum">
               <a:rPr b="0" lang="en-US"/>
               <a:t>10</a:t>
@@ -3505,7 +3505,7 @@
           <a:bodyPr wrap="square" lIns="0" tIns="0" rIns="0" bIns="0" rtlCol="0" anchor="ctr"/>
           <a:lstStyle/>
           <a:p>
-            <a:pPr algn="l" indent="0" marL="0">
+            <a:pPr eaLnBrk="0" algn="l" indent="0" marL="0">
               <a:buNone/>
             </a:pPr>
             <a:r>
@@ -3544,7 +3544,7 @@
           <a:bodyPr wrap="square" lIns="0" tIns="0" rIns="0" bIns="0" rtlCol="0" anchor="ctr"/>
           <a:lstStyle/>
           <a:p>
-            <a:pPr algn="l" indent="0" marL="0">
+            <a:pPr eaLnBrk="0" algn="l" indent="0" marL="0">
               <a:buNone/>
             </a:pPr>
             <a:r>
@@ -3610,7 +3610,7 @@
           <a:bodyPr wrap="square" lIns="0" tIns="0" rIns="0" bIns="0" rtlCol="0" anchor="ctr"/>
           <a:lstStyle/>
           <a:p>
-            <a:pPr indent="0" marL="0">
+            <a:pPr eaLnBrk="0" indent="0" marL="0">
               <a:spcAft>
                 <a:spcPts val="600"/>
               </a:spcAft>
@@ -3660,7 +3660,7 @@
           <a:bodyPr wrap="square" lIns="0" tIns="0" rIns="0" bIns="0" rtlCol="0" anchor="ctr"/>
           <a:lstStyle/>
           <a:p>
-            <a:pPr algn="ctr" indent="0" marL="0">
+            <a:pPr eaLnBrk="0" algn="ctr" indent="0" marL="0">
               <a:buNone/>
             </a:pPr>
             <a:r>
@@ -3726,7 +3726,7 @@
           <a:bodyPr wrap="square" lIns="0" tIns="0" rIns="0" bIns="0" rtlCol="0" anchor="ctr"/>
           <a:lstStyle/>
           <a:p>
-            <a:pPr indent="0" marL="0">
+            <a:pPr eaLnBrk="0" indent="0" marL="0">
               <a:spcAft>
                 <a:spcPts val="600"/>
               </a:spcAft>
@@ -3776,7 +3776,7 @@
           <a:bodyPr wrap="square" lIns="0" tIns="0" rIns="0" bIns="0" rtlCol="0" anchor="ctr"/>
           <a:lstStyle/>
           <a:p>
-            <a:pPr algn="ctr" indent="0" marL="0">
+            <a:pPr eaLnBrk="0" algn="ctr" indent="0" marL="0">
               <a:buNone/>
             </a:pPr>
             <a:r>
@@ -3842,7 +3842,7 @@
           <a:bodyPr wrap="square" lIns="0" tIns="0" rIns="0" bIns="0" rtlCol="0" anchor="ctr"/>
           <a:lstStyle/>
           <a:p>
-            <a:pPr indent="0" marL="0">
+            <a:pPr eaLnBrk="0" indent="0" marL="0">
               <a:spcAft>
                 <a:spcPts val="600"/>
               </a:spcAft>
@@ -3892,7 +3892,7 @@
           <a:bodyPr wrap="square" lIns="0" tIns="0" rIns="0" bIns="0" rtlCol="0" anchor="ctr"/>
           <a:lstStyle/>
           <a:p>
-            <a:pPr algn="ctr" indent="0" marL="0">
+            <a:pPr eaLnBrk="0" algn="ctr" indent="0" marL="0">
               <a:buNone/>
             </a:pPr>
             <a:r>
@@ -3958,7 +3958,7 @@
           <a:bodyPr wrap="square" lIns="0" tIns="0" rIns="0" bIns="0" rtlCol="0" anchor="ctr"/>
           <a:lstStyle/>
           <a:p>
-            <a:pPr indent="0" marL="0">
+            <a:pPr eaLnBrk="0" indent="0" marL="0">
               <a:spcAft>
                 <a:spcPts val="600"/>
               </a:spcAft>
@@ -4018,7 +4018,7 @@
             </a:lvl1pPr>
           </a:lstStyle>
           <a:p>
-            <a:pPr algn="r"/>
+            <a:pPr eaLnBrk="0" algn="r"/>
             <a:fld id="{F7021451-1387-4CA6-816F-3879F97B5CBC}" type="slidenum">
               <a:rPr b="0" lang="en-US"/>
               <a:t>11</a:t>
@@ -4075,7 +4075,7 @@
           <a:bodyPr wrap="square" lIns="0" tIns="0" rIns="0" bIns="0" rtlCol="0" anchor="ctr"/>
           <a:lstStyle/>
           <a:p>
-            <a:pPr algn="l" indent="0" marL="0">
+            <a:pPr eaLnBrk="0" algn="l" indent="0" marL="0">
               <a:buNone/>
             </a:pPr>
             <a:r>
@@ -4141,7 +4141,7 @@
           <a:bodyPr wrap="square" lIns="0" tIns="0" rIns="0" bIns="0" rtlCol="0" anchor="ctr"/>
           <a:lstStyle/>
           <a:p>
-            <a:pPr indent="0" marL="0">
+            <a:pPr eaLnBrk="0" indent="0" marL="0">
               <a:spcAft>
                 <a:spcPts val="600"/>
               </a:spcAft>
@@ -4191,7 +4191,7 @@
           <a:bodyPr wrap="square" lIns="177800" tIns="0" rIns="177800" bIns="0" rtlCol="0" anchor="ctr"/>
           <a:lstStyle/>
           <a:p>
-            <a:pPr algn="l" indent="0" marL="0">
+            <a:pPr eaLnBrk="0" algn="l" indent="0" marL="0">
               <a:buNone/>
             </a:pPr>
             <a:r>
@@ -4238,7 +4238,7 @@
           <a:bodyPr wrap="square" lIns="177800" tIns="0" rIns="177800" bIns="0" rtlCol="0" anchor="ctr"/>
           <a:lstStyle/>
           <a:p>
-            <a:pPr algn="l" indent="0" marL="0">
+            <a:pPr eaLnBrk="0" algn="l" indent="0" marL="0">
               <a:buNone/>
             </a:pPr>
             <a:r>
@@ -4277,7 +4277,7 @@
           <a:bodyPr wrap="square" lIns="0" tIns="0" rIns="0" bIns="0" rtlCol="0" anchor="t"/>
           <a:lstStyle/>
           <a:p>
-            <a:pPr algn="l" indent="0" marL="0">
+            <a:pPr eaLnBrk="0" algn="l" indent="0" marL="0">
               <a:buNone/>
             </a:pPr>
             <a:r>
@@ -4316,7 +4316,7 @@
           <a:bodyPr wrap="square" lIns="0" tIns="0" rIns="0" bIns="0" rtlCol="0" anchor="ctr"/>
           <a:lstStyle/>
           <a:p>
-            <a:pPr algn="l" indent="0" marL="0">
+            <a:pPr eaLnBrk="0" algn="l" indent="0" marL="0">
               <a:buNone/>
             </a:pPr>
             <a:r>
@@ -4355,7 +4355,7 @@
           <a:bodyPr wrap="square" lIns="0" tIns="0" rIns="0" bIns="0" rtlCol="0" anchor="ctr"/>
           <a:lstStyle/>
           <a:p>
-            <a:pPr algn="l" indent="0" marL="0">
+            <a:pPr eaLnBrk="0" algn="l" indent="0" marL="0">
               <a:buNone/>
             </a:pPr>
             <a:r>
@@ -4394,7 +4394,7 @@
           <a:bodyPr wrap="square" lIns="0" tIns="0" rIns="0" bIns="0" rtlCol="0" anchor="ctr"/>
           <a:lstStyle/>
           <a:p>
-            <a:pPr algn="l" indent="0" marL="0">
+            <a:pPr eaLnBrk="0" algn="l" indent="0" marL="0">
               <a:buNone/>
             </a:pPr>
             <a:r>
@@ -4433,7 +4433,7 @@
           <a:bodyPr wrap="square" lIns="0" tIns="0" rIns="0" bIns="0" rtlCol="0" anchor="ctr"/>
           <a:lstStyle/>
           <a:p>
-            <a:pPr algn="l" indent="0" marL="0">
+            <a:pPr eaLnBrk="0" algn="l" indent="0" marL="0">
               <a:buNone/>
             </a:pPr>
             <a:r>
@@ -4490,7 +4490,7 @@
             </a:lvl1pPr>
           </a:lstStyle>
           <a:p>
-            <a:pPr algn="r"/>
+            <a:pPr eaLnBrk="0" algn="r"/>
             <a:fld id="{F7021451-1387-4CA6-816F-3879F97B5CBC}" type="slidenum">
               <a:rPr b="0" lang="en-US"/>
               <a:t>12</a:t>
@@ -4547,7 +4547,7 @@
           <a:bodyPr wrap="square" lIns="0" tIns="0" rIns="0" bIns="0" rtlCol="0" anchor="ctr"/>
           <a:lstStyle/>
           <a:p>
-            <a:pPr algn="l" indent="0" marL="0">
+            <a:pPr eaLnBrk="0" algn="l" indent="0" marL="0">
               <a:buNone/>
             </a:pPr>
             <a:r>
@@ -4586,7 +4586,7 @@
           <a:bodyPr wrap="square" lIns="0" tIns="0" rIns="0" bIns="0" rtlCol="0" anchor="ctr"/>
           <a:lstStyle/>
           <a:p>
-            <a:pPr algn="l" indent="0" marL="0">
+            <a:pPr eaLnBrk="0" algn="l" indent="0" marL="0">
               <a:buNone/>
             </a:pPr>
             <a:r>
@@ -4652,7 +4652,7 @@
           <a:bodyPr wrap="square" lIns="0" tIns="0" rIns="0" bIns="0" rtlCol="0" anchor="ctr"/>
           <a:lstStyle/>
           <a:p>
-            <a:pPr indent="0" marL="0">
+            <a:pPr eaLnBrk="0" indent="0" marL="0">
               <a:spcAft>
                 <a:spcPts val="600"/>
               </a:spcAft>
@@ -4798,7 +4798,7 @@
           <a:bodyPr wrap="square" lIns="0" tIns="0" rIns="0" bIns="0" rtlCol="0" anchor="ctr"/>
           <a:lstStyle/>
           <a:p>
-            <a:pPr algn="ctr" indent="0" marL="0">
+            <a:pPr eaLnBrk="0" algn="ctr" indent="0" marL="0">
               <a:buNone/>
             </a:pPr>
             <a:r>
@@ -4941,7 +4941,7 @@
           <a:bodyPr wrap="square" lIns="0" tIns="0" rIns="0" bIns="0" rtlCol="0" anchor="ctr"/>
           <a:lstStyle/>
           <a:p>
-            <a:pPr algn="ctr" indent="0" marL="0">
+            <a:pPr eaLnBrk="0" algn="ctr" indent="0" marL="0">
               <a:buNone/>
             </a:pPr>
             <a:r>
@@ -4998,7 +4998,7 @@
             </a:lvl1pPr>
           </a:lstStyle>
           <a:p>
-            <a:pPr algn="r"/>
+            <a:pPr eaLnBrk="0" algn="r"/>
             <a:fld id="{F7021451-1387-4CA6-816F-3879F97B5CBC}" type="slidenum">
               <a:rPr b="0" lang="en-US"/>
               <a:t>13</a:t>
@@ -5055,7 +5055,7 @@
           <a:bodyPr wrap="square" lIns="0" tIns="0" rIns="0" bIns="0" rtlCol="0" anchor="ctr"/>
           <a:lstStyle/>
           <a:p>
-            <a:pPr algn="l" indent="0" marL="0">
+            <a:pPr eaLnBrk="0" algn="l" indent="0" marL="0">
               <a:buNone/>
             </a:pPr>
             <a:r>
@@ -5102,7 +5102,7 @@
           <a:bodyPr wrap="square" lIns="0" tIns="0" rIns="0" bIns="0" rtlCol="0" anchor="ctr"/>
           <a:lstStyle/>
           <a:p>
-            <a:pPr algn="ctr" indent="0" marL="0">
+            <a:pPr eaLnBrk="0" algn="ctr" indent="0" marL="0">
               <a:buNone/>
             </a:pPr>
             <a:r>
@@ -5141,7 +5141,7 @@
           <a:bodyPr wrap="square" lIns="0" tIns="0" rIns="0" bIns="0" rtlCol="0" anchor="ctr"/>
           <a:lstStyle/>
           <a:p>
-            <a:pPr algn="ctr" indent="0" marL="0">
+            <a:pPr eaLnBrk="0" algn="ctr" indent="0" marL="0">
               <a:buNone/>
             </a:pPr>
             <a:r>
@@ -5158,7 +5158,7 @@
             <a:endParaRPr lang="ko-KR" sz="2600" dirty="0"/>
           </a:p>
           <a:p>
-            <a:pPr algn="ctr" indent="0" marL="0">
+            <a:pPr eaLnBrk="0" algn="ctr" indent="0" marL="0">
               <a:buNone/>
             </a:pPr>
             <a:r>
@@ -5175,7 +5175,7 @@
             <a:endParaRPr lang="ko-KR" sz="2600" dirty="0"/>
           </a:p>
           <a:p>
-            <a:pPr algn="ctr" indent="0" marL="0">
+            <a:pPr eaLnBrk="0" algn="ctr" indent="0" marL="0">
               <a:buNone/>
             </a:pPr>
             <a:r>
@@ -5222,7 +5222,7 @@
           <a:bodyPr wrap="square" lIns="0" tIns="0" rIns="0" bIns="0" rtlCol="0" anchor="ctr"/>
           <a:lstStyle/>
           <a:p>
-            <a:pPr algn="ctr" indent="0" marL="0">
+            <a:pPr eaLnBrk="0" algn="ctr" indent="0" marL="0">
               <a:buNone/>
             </a:pPr>
             <a:r>
@@ -5261,7 +5261,7 @@
           <a:bodyPr wrap="square" lIns="0" tIns="0" rIns="0" bIns="0" rtlCol="0" anchor="ctr"/>
           <a:lstStyle/>
           <a:p>
-            <a:pPr algn="ctr" indent="0" marL="0">
+            <a:pPr eaLnBrk="0" algn="ctr" indent="0" marL="0">
               <a:buNone/>
             </a:pPr>
             <a:r>
@@ -5278,7 +5278,7 @@
             <a:endParaRPr lang="ko-KR" sz="2600" dirty="0"/>
           </a:p>
           <a:p>
-            <a:pPr algn="ctr" indent="0" marL="0">
+            <a:pPr eaLnBrk="0" algn="ctr" indent="0" marL="0">
               <a:buNone/>
             </a:pPr>
             <a:r>
@@ -5295,7 +5295,7 @@
             <a:endParaRPr lang="ko-KR" sz="2600" dirty="0"/>
           </a:p>
           <a:p>
-            <a:pPr algn="ctr" indent="0" marL="0">
+            <a:pPr eaLnBrk="0" algn="ctr" indent="0" marL="0">
               <a:buNone/>
             </a:pPr>
             <a:r>
@@ -5342,7 +5342,7 @@
           <a:bodyPr wrap="square" lIns="0" tIns="0" rIns="0" bIns="0" rtlCol="0" anchor="ctr"/>
           <a:lstStyle/>
           <a:p>
-            <a:pPr algn="ctr" indent="0" marL="0">
+            <a:pPr eaLnBrk="0" algn="ctr" indent="0" marL="0">
               <a:buNone/>
             </a:pPr>
             <a:r>
@@ -5381,7 +5381,7 @@
           <a:bodyPr wrap="square" lIns="0" tIns="0" rIns="0" bIns="0" rtlCol="0" anchor="ctr"/>
           <a:lstStyle/>
           <a:p>
-            <a:pPr algn="l" indent="0" marL="0">
+            <a:pPr eaLnBrk="0" algn="l" indent="0" marL="0">
               <a:buNone/>
             </a:pPr>
             <a:r>
@@ -5438,7 +5438,7 @@
             </a:lvl1pPr>
           </a:lstStyle>
           <a:p>
-            <a:pPr algn="r"/>
+            <a:pPr eaLnBrk="0" algn="r"/>
             <a:fld id="{F7021451-1387-4CA6-816F-3879F97B5CBC}" type="slidenum">
               <a:rPr b="0" lang="en-US"/>
               <a:t>2</a:t>
@@ -5495,7 +5495,7 @@
           <a:bodyPr wrap="square" lIns="0" tIns="0" rIns="0" bIns="0" rtlCol="0" anchor="ctr"/>
           <a:lstStyle/>
           <a:p>
-            <a:pPr algn="l" indent="0" marL="0">
+            <a:pPr eaLnBrk="0" algn="l" indent="0" marL="0">
               <a:buNone/>
             </a:pPr>
             <a:r>
@@ -5534,7 +5534,7 @@
           <a:bodyPr wrap="square" lIns="0" tIns="0" rIns="0" bIns="0" rtlCol="0" anchor="ctr"/>
           <a:lstStyle/>
           <a:p>
-            <a:pPr algn="l" indent="0" marL="0">
+            <a:pPr eaLnBrk="0" algn="l" indent="0" marL="0">
               <a:buNone/>
             </a:pPr>
             <a:r>
@@ -5600,7 +5600,7 @@
           <a:bodyPr wrap="square" lIns="0" tIns="0" rIns="0" bIns="0" rtlCol="0" anchor="ctr"/>
           <a:lstStyle/>
           <a:p>
-            <a:pPr indent="0" marL="0">
+            <a:pPr eaLnBrk="0" indent="0" marL="0">
               <a:spcAft>
                 <a:spcPts val="600"/>
               </a:spcAft>
@@ -5620,7 +5620,7 @@
             <a:endParaRPr lang="ko-KR" sz="3200" dirty="0"/>
           </a:p>
           <a:p>
-            <a:pPr indent="0" marL="0">
+            <a:pPr eaLnBrk="0" indent="0" marL="0">
               <a:spcAft>
                 <a:spcPts val="600"/>
               </a:spcAft>
@@ -5766,7 +5766,7 @@
           <a:bodyPr wrap="square" lIns="0" tIns="0" rIns="0" bIns="0" rtlCol="0" anchor="ctr"/>
           <a:lstStyle/>
           <a:p>
-            <a:pPr algn="ctr" indent="0" marL="0">
+            <a:pPr eaLnBrk="0" algn="ctr" indent="0" marL="0">
               <a:buNone/>
             </a:pPr>
             <a:r>
@@ -5884,7 +5884,7 @@
           <a:bodyPr wrap="square" lIns="0" tIns="0" rIns="0" bIns="0" rtlCol="0" anchor="ctr"/>
           <a:lstStyle/>
           <a:p>
-            <a:pPr algn="ctr" indent="0" marL="0">
+            <a:pPr eaLnBrk="0" algn="ctr" indent="0" marL="0">
               <a:buNone/>
             </a:pPr>
             <a:r>
@@ -5941,7 +5941,7 @@
             </a:lvl1pPr>
           </a:lstStyle>
           <a:p>
-            <a:pPr algn="r"/>
+            <a:pPr eaLnBrk="0" algn="r"/>
             <a:fld id="{F7021451-1387-4CA6-816F-3879F97B5CBC}" type="slidenum">
               <a:rPr b="0" lang="en-US"/>
               <a:t>3</a:t>
@@ -5998,7 +5998,7 @@
           <a:bodyPr wrap="square" lIns="0" tIns="0" rIns="0" bIns="0" rtlCol="0" anchor="ctr"/>
           <a:lstStyle/>
           <a:p>
-            <a:pPr algn="l" indent="0" marL="0">
+            <a:pPr eaLnBrk="0" algn="l" indent="0" marL="0">
               <a:buNone/>
             </a:pPr>
             <a:r>
@@ -6037,7 +6037,7 @@
           <a:bodyPr wrap="square" lIns="0" tIns="0" rIns="0" bIns="0" rtlCol="0" anchor="ctr"/>
           <a:lstStyle/>
           <a:p>
-            <a:pPr algn="l" indent="0" marL="0">
+            <a:pPr eaLnBrk="0" algn="l" indent="0" marL="0">
               <a:buNone/>
             </a:pPr>
             <a:r>
@@ -6103,7 +6103,7 @@
           <a:bodyPr wrap="square" lIns="0" tIns="0" rIns="0" bIns="0" rtlCol="0" anchor="ctr"/>
           <a:lstStyle/>
           <a:p>
-            <a:pPr indent="0" marL="0">
+            <a:pPr eaLnBrk="0" indent="0" marL="0">
               <a:spcAft>
                 <a:spcPts val="600"/>
               </a:spcAft>
@@ -6123,7 +6123,7 @@
             <a:endParaRPr lang="ko-KR" sz="3200" dirty="0"/>
           </a:p>
           <a:p>
-            <a:pPr indent="0" marL="0">
+            <a:pPr eaLnBrk="0" indent="0" marL="0">
               <a:spcAft>
                 <a:spcPts val="600"/>
               </a:spcAft>
@@ -6294,7 +6294,7 @@
           <a:bodyPr wrap="square" lIns="0" tIns="0" rIns="0" bIns="0" rtlCol="0" anchor="ctr"/>
           <a:lstStyle/>
           <a:p>
-            <a:pPr algn="ctr" indent="0" marL="0">
+            <a:pPr eaLnBrk="0" algn="ctr" indent="0" marL="0">
               <a:buNone/>
             </a:pPr>
             <a:r>
@@ -6412,7 +6412,7 @@
           <a:bodyPr wrap="square" lIns="0" tIns="0" rIns="0" bIns="0" rtlCol="0" anchor="ctr"/>
           <a:lstStyle/>
           <a:p>
-            <a:pPr algn="ctr" indent="0" marL="0">
+            <a:pPr eaLnBrk="0" algn="ctr" indent="0" marL="0">
               <a:buNone/>
             </a:pPr>
             <a:r>
@@ -6469,7 +6469,7 @@
             </a:lvl1pPr>
           </a:lstStyle>
           <a:p>
-            <a:pPr algn="r"/>
+            <a:pPr eaLnBrk="0" algn="r"/>
             <a:fld id="{F7021451-1387-4CA6-816F-3879F97B5CBC}" type="slidenum">
               <a:rPr b="0" lang="en-US"/>
               <a:t>4</a:t>
@@ -6526,7 +6526,7 @@
           <a:bodyPr wrap="square" lIns="0" tIns="0" rIns="0" bIns="0" rtlCol="0" anchor="ctr"/>
           <a:lstStyle/>
           <a:p>
-            <a:pPr algn="l" indent="0" marL="0">
+            <a:pPr eaLnBrk="0" algn="l" indent="0" marL="0">
               <a:buNone/>
             </a:pPr>
             <a:r>
@@ -6565,7 +6565,7 @@
           <a:bodyPr wrap="square" lIns="0" tIns="0" rIns="0" bIns="0" rtlCol="0" anchor="ctr"/>
           <a:lstStyle/>
           <a:p>
-            <a:pPr algn="l" indent="0" marL="0">
+            <a:pPr eaLnBrk="0" algn="l" indent="0" marL="0">
               <a:buNone/>
             </a:pPr>
             <a:r>
@@ -6610,7 +6610,7 @@
           <a:bodyPr wrap="square" lIns="0" tIns="0" rIns="0" bIns="0" rtlCol="0" anchor="ctr"/>
           <a:lstStyle/>
           <a:p>
-            <a:pPr algn="ctr" indent="0" marL="0">
+            <a:pPr eaLnBrk="0" algn="ctr" indent="0" marL="0">
               <a:buNone/>
             </a:pPr>
             <a:r>
@@ -6649,7 +6649,7 @@
           <a:bodyPr wrap="square" lIns="0" tIns="0" rIns="0" bIns="0" rtlCol="0" anchor="t"/>
           <a:lstStyle/>
           <a:p>
-            <a:pPr algn="l" indent="0" marL="0">
+            <a:pPr eaLnBrk="0" algn="l" indent="0" marL="0">
               <a:buNone/>
             </a:pPr>
             <a:r>
@@ -6694,7 +6694,7 @@
           <a:bodyPr wrap="square" lIns="0" tIns="0" rIns="0" bIns="0" rtlCol="0" anchor="ctr"/>
           <a:lstStyle/>
           <a:p>
-            <a:pPr algn="ctr" indent="0" marL="0">
+            <a:pPr eaLnBrk="0" algn="ctr" indent="0" marL="0">
               <a:buNone/>
             </a:pPr>
             <a:r>
@@ -6733,7 +6733,7 @@
           <a:bodyPr wrap="square" lIns="0" tIns="0" rIns="0" bIns="0" rtlCol="0" anchor="t"/>
           <a:lstStyle/>
           <a:p>
-            <a:pPr algn="l" indent="0" marL="0">
+            <a:pPr eaLnBrk="0" algn="l" indent="0" marL="0">
               <a:buNone/>
             </a:pPr>
             <a:r>
@@ -6778,7 +6778,7 @@
           <a:bodyPr wrap="square" lIns="0" tIns="0" rIns="0" bIns="0" rtlCol="0" anchor="ctr"/>
           <a:lstStyle/>
           <a:p>
-            <a:pPr algn="ctr" indent="0" marL="0">
+            <a:pPr eaLnBrk="0" algn="ctr" indent="0" marL="0">
               <a:buNone/>
             </a:pPr>
             <a:r>
@@ -6817,7 +6817,7 @@
           <a:bodyPr wrap="square" lIns="0" tIns="0" rIns="0" bIns="0" rtlCol="0" anchor="t"/>
           <a:lstStyle/>
           <a:p>
-            <a:pPr algn="l" indent="0" marL="0">
+            <a:pPr eaLnBrk="0" algn="l" indent="0" marL="0">
               <a:buNone/>
             </a:pPr>
             <a:r>
@@ -6862,7 +6862,7 @@
           <a:bodyPr wrap="square" lIns="0" tIns="0" rIns="0" bIns="0" rtlCol="0" anchor="ctr"/>
           <a:lstStyle/>
           <a:p>
-            <a:pPr algn="ctr" indent="0" marL="0">
+            <a:pPr eaLnBrk="0" algn="ctr" indent="0" marL="0">
               <a:buNone/>
             </a:pPr>
             <a:r>
@@ -6901,7 +6901,7 @@
           <a:bodyPr wrap="square" lIns="0" tIns="0" rIns="0" bIns="0" rtlCol="0" anchor="t"/>
           <a:lstStyle/>
           <a:p>
-            <a:pPr algn="l" indent="0" marL="0">
+            <a:pPr eaLnBrk="0" algn="l" indent="0" marL="0">
               <a:buNone/>
             </a:pPr>
             <a:r>
@@ -6958,7 +6958,7 @@
             </a:lvl1pPr>
           </a:lstStyle>
           <a:p>
-            <a:pPr algn="r"/>
+            <a:pPr eaLnBrk="0" algn="r"/>
             <a:fld id="{F7021451-1387-4CA6-816F-3879F97B5CBC}" type="slidenum">
               <a:rPr b="0" lang="en-US"/>
               <a:t>5</a:t>
@@ -7015,7 +7015,7 @@
           <a:bodyPr wrap="square" lIns="0" tIns="0" rIns="0" bIns="0" rtlCol="0" anchor="ctr"/>
           <a:lstStyle/>
           <a:p>
-            <a:pPr algn="l" indent="0" marL="0">
+            <a:pPr eaLnBrk="0" algn="l" indent="0" marL="0">
               <a:buNone/>
             </a:pPr>
             <a:r>
@@ -7054,7 +7054,7 @@
           <a:bodyPr wrap="square" lIns="0" tIns="0" rIns="0" bIns="0" rtlCol="0" anchor="ctr"/>
           <a:lstStyle/>
           <a:p>
-            <a:pPr algn="l" indent="0" marL="0">
+            <a:pPr eaLnBrk="0" algn="l" indent="0" marL="0">
               <a:buNone/>
             </a:pPr>
             <a:r>
@@ -7141,7 +7141,7 @@
           <a:bodyPr wrap="square" lIns="0" tIns="0" rIns="0" bIns="0" rtlCol="0" anchor="ctr"/>
           <a:lstStyle/>
           <a:p>
-            <a:pPr algn="ctr" indent="0" marL="0">
+            <a:pPr eaLnBrk="0" algn="ctr" indent="0" marL="0">
               <a:buNone/>
             </a:pPr>
             <a:r>
@@ -7203,7 +7203,7 @@
           <a:bodyPr wrap="square" lIns="0" tIns="0" rIns="0" bIns="0" rtlCol="0" anchor="ctr"/>
           <a:lstStyle/>
           <a:p>
-            <a:pPr algn="ctr" indent="0" marL="0">
+            <a:pPr eaLnBrk="0" algn="ctr" indent="0" marL="0">
               <a:buNone/>
             </a:pPr>
             <a:r>
@@ -7265,7 +7265,7 @@
           <a:bodyPr wrap="square" lIns="0" tIns="0" rIns="0" bIns="0" rtlCol="0" anchor="ctr"/>
           <a:lstStyle/>
           <a:p>
-            <a:pPr algn="ctr" indent="0" marL="0">
+            <a:pPr eaLnBrk="0" algn="ctr" indent="0" marL="0">
               <a:buNone/>
             </a:pPr>
             <a:r>
@@ -7327,7 +7327,7 @@
           <a:bodyPr wrap="square" lIns="0" tIns="0" rIns="0" bIns="0" rtlCol="0" anchor="ctr"/>
           <a:lstStyle/>
           <a:p>
-            <a:pPr algn="ctr" indent="0" marL="0">
+            <a:pPr eaLnBrk="0" algn="ctr" indent="0" marL="0">
               <a:buNone/>
             </a:pPr>
             <a:r>
@@ -7389,7 +7389,7 @@
           <a:bodyPr wrap="square" lIns="0" tIns="0" rIns="0" bIns="0" rtlCol="0" anchor="ctr"/>
           <a:lstStyle/>
           <a:p>
-            <a:pPr algn="ctr" indent="0" marL="0">
+            <a:pPr eaLnBrk="0" algn="ctr" indent="0" marL="0">
               <a:buNone/>
             </a:pPr>
             <a:r>
@@ -7451,7 +7451,7 @@
           <a:bodyPr wrap="square" lIns="0" tIns="0" rIns="0" bIns="0" rtlCol="0" anchor="ctr"/>
           <a:lstStyle/>
           <a:p>
-            <a:pPr algn="ctr" indent="0" marL="0">
+            <a:pPr eaLnBrk="0" algn="ctr" indent="0" marL="0">
               <a:buNone/>
             </a:pPr>
             <a:r>
@@ -7513,7 +7513,7 @@
           <a:bodyPr wrap="square" lIns="0" tIns="0" rIns="0" bIns="0" rtlCol="0" anchor="ctr"/>
           <a:lstStyle/>
           <a:p>
-            <a:pPr algn="ctr" indent="0" marL="0">
+            <a:pPr eaLnBrk="0" algn="ctr" indent="0" marL="0">
               <a:buNone/>
             </a:pPr>
             <a:r>
@@ -7575,7 +7575,7 @@
           <a:bodyPr wrap="square" lIns="0" tIns="0" rIns="0" bIns="0" rtlCol="0" anchor="ctr"/>
           <a:lstStyle/>
           <a:p>
-            <a:pPr algn="ctr" indent="0" marL="0">
+            <a:pPr eaLnBrk="0" algn="ctr" indent="0" marL="0">
               <a:buNone/>
             </a:pPr>
             <a:r>
@@ -7637,7 +7637,7 @@
           <a:bodyPr wrap="square" lIns="0" tIns="0" rIns="0" bIns="0" rtlCol="0" anchor="ctr"/>
           <a:lstStyle/>
           <a:p>
-            <a:pPr algn="ctr" indent="0" marL="0">
+            <a:pPr eaLnBrk="0" algn="ctr" indent="0" marL="0">
               <a:buNone/>
             </a:pPr>
             <a:r>
@@ -7699,7 +7699,7 @@
           <a:bodyPr wrap="square" lIns="0" tIns="0" rIns="0" bIns="0" rtlCol="0" anchor="ctr"/>
           <a:lstStyle/>
           <a:p>
-            <a:pPr algn="ctr" indent="0" marL="0">
+            <a:pPr eaLnBrk="0" algn="ctr" indent="0" marL="0">
               <a:buNone/>
             </a:pPr>
             <a:r>
@@ -7892,7 +7892,7 @@
           <a:bodyPr wrap="square" lIns="0" tIns="0" rIns="0" bIns="0" rtlCol="0" anchor="ctr"/>
           <a:lstStyle/>
           <a:p>
-            <a:pPr algn="ctr" indent="0" marL="0">
+            <a:pPr eaLnBrk="0" algn="ctr" indent="0" marL="0">
               <a:buNone/>
             </a:pPr>
             <a:r>
@@ -7931,7 +7931,7 @@
           <a:bodyPr wrap="square" lIns="0" tIns="0" rIns="0" bIns="0" rtlCol="0" anchor="t"/>
           <a:lstStyle/>
           <a:p>
-            <a:pPr algn="l" indent="0" marL="0">
+            <a:pPr eaLnBrk="0" algn="l" indent="0" marL="0">
               <a:buNone/>
             </a:pPr>
             <a:r>
@@ -7976,7 +7976,7 @@
           <a:bodyPr wrap="square" lIns="0" tIns="0" rIns="0" bIns="0" rtlCol="0" anchor="ctr"/>
           <a:lstStyle/>
           <a:p>
-            <a:pPr algn="ctr" indent="0" marL="0">
+            <a:pPr eaLnBrk="0" algn="ctr" indent="0" marL="0">
               <a:buNone/>
             </a:pPr>
             <a:r>
@@ -8015,7 +8015,7 @@
           <a:bodyPr wrap="square" lIns="0" tIns="0" rIns="0" bIns="0" rtlCol="0" anchor="t"/>
           <a:lstStyle/>
           <a:p>
-            <a:pPr algn="l" indent="0" marL="0">
+            <a:pPr eaLnBrk="0" algn="l" indent="0" marL="0">
               <a:buNone/>
             </a:pPr>
             <a:r>
@@ -8060,7 +8060,7 @@
           <a:bodyPr wrap="square" lIns="0" tIns="0" rIns="0" bIns="0" rtlCol="0" anchor="ctr"/>
           <a:lstStyle/>
           <a:p>
-            <a:pPr algn="ctr" indent="0" marL="0">
+            <a:pPr eaLnBrk="0" algn="ctr" indent="0" marL="0">
               <a:buNone/>
             </a:pPr>
             <a:r>
@@ -8099,7 +8099,7 @@
           <a:bodyPr wrap="square" lIns="0" tIns="0" rIns="0" bIns="0" rtlCol="0" anchor="t"/>
           <a:lstStyle/>
           <a:p>
-            <a:pPr algn="l" indent="0" marL="0">
+            <a:pPr eaLnBrk="0" algn="l" indent="0" marL="0">
               <a:buNone/>
             </a:pPr>
             <a:r>
@@ -8156,7 +8156,7 @@
             </a:lvl1pPr>
           </a:lstStyle>
           <a:p>
-            <a:pPr algn="r"/>
+            <a:pPr eaLnBrk="0" algn="r"/>
             <a:fld id="{F7021451-1387-4CA6-816F-3879F97B5CBC}" type="slidenum">
               <a:rPr b="0" lang="en-US"/>
               <a:t>6</a:t>
@@ -8213,7 +8213,7 @@
           <a:bodyPr wrap="square" lIns="0" tIns="0" rIns="0" bIns="0" rtlCol="0" anchor="ctr"/>
           <a:lstStyle/>
           <a:p>
-            <a:pPr algn="l" indent="0" marL="0">
+            <a:pPr eaLnBrk="0" algn="l" indent="0" marL="0">
               <a:buNone/>
             </a:pPr>
             <a:r>
@@ -8252,7 +8252,7 @@
           <a:bodyPr wrap="square" lIns="0" tIns="0" rIns="0" bIns="0" rtlCol="0" anchor="ctr"/>
           <a:lstStyle/>
           <a:p>
-            <a:pPr algn="l" indent="0" marL="0">
+            <a:pPr eaLnBrk="0" algn="l" indent="0" marL="0">
               <a:buNone/>
             </a:pPr>
             <a:r>
@@ -8318,7 +8318,7 @@
           <a:bodyPr wrap="square" lIns="0" tIns="0" rIns="0" bIns="0" rtlCol="0" anchor="ctr"/>
           <a:lstStyle/>
           <a:p>
-            <a:pPr indent="0" marL="0">
+            <a:pPr eaLnBrk="0" indent="0" marL="0">
               <a:spcAft>
                 <a:spcPts val="600"/>
               </a:spcAft>
@@ -8368,7 +8368,7 @@
           <a:bodyPr wrap="square" lIns="0" tIns="0" rIns="0" bIns="0" rtlCol="0" anchor="ctr"/>
           <a:lstStyle/>
           <a:p>
-            <a:pPr algn="ctr" indent="0" marL="0">
+            <a:pPr eaLnBrk="0" algn="ctr" indent="0" marL="0">
               <a:buNone/>
             </a:pPr>
             <a:r>
@@ -8688,7 +8688,7 @@
       </p:sp>
       <p:sp>
         <p:nvSpPr>
-          <p:cNvPr id="19" name="S07-figure100" descr="십 칸 틀에 2개"/>
+          <p:cNvPr id="19" name="S07-figure100" descr="1개의 십 칸 틀 중 1번째: 모두 2개"/>
           <p:cNvSpPr/>
           <p:nvPr/>
         </p:nvSpPr>
@@ -9065,7 +9065,7 @@
       </p:sp>
       <p:sp>
         <p:nvSpPr>
-          <p:cNvPr id="34" name="S07-figure115" descr="십 칸 틀에 4개"/>
+          <p:cNvPr id="34" name="S07-figure115" descr="1개의 십 칸 틀 중 1번째: 모두 4개"/>
           <p:cNvSpPr/>
           <p:nvPr/>
         </p:nvSpPr>
@@ -9119,7 +9119,7 @@
           <a:bodyPr wrap="square" lIns="0" tIns="0" rIns="0" bIns="0" rtlCol="0" anchor="ctr"/>
           <a:lstStyle/>
           <a:p>
-            <a:pPr algn="ctr" indent="0" marL="0">
+            <a:pPr eaLnBrk="0" algn="ctr" indent="0" marL="0">
               <a:buNone/>
             </a:pPr>
             <a:r>
@@ -9514,7 +9514,7 @@
       </p:sp>
       <p:sp>
         <p:nvSpPr>
-          <p:cNvPr id="51" name="S07-figure132" descr="십 칸 틀에 5개"/>
+          <p:cNvPr id="51" name="S07-figure132" descr="1개의 십 칸 틀 중 1번째: 모두 5개"/>
           <p:cNvSpPr/>
           <p:nvPr/>
         </p:nvSpPr>
@@ -9866,7 +9866,7 @@
       </p:sp>
       <p:sp>
         <p:nvSpPr>
-          <p:cNvPr id="65" name="S07-figure146" descr="십 칸 틀에 3개"/>
+          <p:cNvPr id="65" name="S07-figure146" descr="1개의 십 칸 틀 중 1번째: 모두 3개"/>
           <p:cNvSpPr/>
           <p:nvPr/>
         </p:nvSpPr>
@@ -9920,7 +9920,7 @@
           <a:bodyPr wrap="square" lIns="0" tIns="0" rIns="0" bIns="0" rtlCol="0" anchor="ctr"/>
           <a:lstStyle/>
           <a:p>
-            <a:pPr algn="ctr" indent="0" marL="0">
+            <a:pPr eaLnBrk="0" algn="ctr" indent="0" marL="0">
               <a:buNone/>
             </a:pPr>
             <a:r>
@@ -10215,7 +10215,7 @@
       </p:sp>
       <p:sp>
         <p:nvSpPr>
-          <p:cNvPr id="78" name="S07-figure159" descr="십 칸 틀에 1개"/>
+          <p:cNvPr id="78" name="S07-figure159" descr="1개의 십 칸 틀 중 1번째: 모두 1개"/>
           <p:cNvSpPr/>
           <p:nvPr/>
         </p:nvSpPr>
@@ -10642,7 +10642,7 @@
       </p:sp>
       <p:sp>
         <p:nvSpPr>
-          <p:cNvPr id="95" name="S07-figure176" descr="십 칸 틀에 6개"/>
+          <p:cNvPr id="95" name="S07-figure176" descr="1개의 십 칸 틀 중 1번째: 모두 6개"/>
           <p:cNvSpPr/>
           <p:nvPr/>
         </p:nvSpPr>
@@ -10706,7 +10706,7 @@
             </a:lvl1pPr>
           </a:lstStyle>
           <a:p>
-            <a:pPr algn="r"/>
+            <a:pPr eaLnBrk="0" algn="r"/>
             <a:fld id="{F7021451-1387-4CA6-816F-3879F97B5CBC}" type="slidenum">
               <a:rPr b="0" lang="en-US"/>
               <a:t>7</a:t>
@@ -10763,7 +10763,7 @@
           <a:bodyPr wrap="square" lIns="0" tIns="0" rIns="0" bIns="0" rtlCol="0" anchor="ctr"/>
           <a:lstStyle/>
           <a:p>
-            <a:pPr algn="l" indent="0" marL="0">
+            <a:pPr eaLnBrk="0" algn="l" indent="0" marL="0">
               <a:buNone/>
             </a:pPr>
             <a:r>
@@ -10829,7 +10829,7 @@
           <a:bodyPr wrap="square" lIns="0" tIns="0" rIns="0" bIns="0" rtlCol="0" anchor="ctr"/>
           <a:lstStyle/>
           <a:p>
-            <a:pPr indent="0" marL="0">
+            <a:pPr eaLnBrk="0" indent="0" marL="0">
               <a:spcAft>
                 <a:spcPts val="600"/>
               </a:spcAft>
@@ -10879,7 +10879,7 @@
           <a:bodyPr wrap="square" lIns="0" tIns="0" rIns="0" bIns="0" rtlCol="0" anchor="ctr"/>
           <a:lstStyle/>
           <a:p>
-            <a:pPr algn="ctr" indent="0" marL="0">
+            <a:pPr eaLnBrk="0" algn="ctr" indent="0" marL="0">
               <a:buNone/>
             </a:pPr>
             <a:r>
@@ -10918,7 +10918,7 @@
           <a:bodyPr wrap="square" lIns="0" tIns="0" rIns="0" bIns="0" rtlCol="0" anchor="ctr"/>
           <a:lstStyle/>
           <a:p>
-            <a:pPr algn="l" indent="0" marL="0">
+            <a:pPr eaLnBrk="0" algn="l" indent="0" marL="0">
               <a:buNone/>
             </a:pPr>
             <a:r>
@@ -10965,7 +10965,7 @@
           <a:bodyPr wrap="square" lIns="0" tIns="0" rIns="0" bIns="0" rtlCol="0" anchor="ctr"/>
           <a:lstStyle/>
           <a:p>
-            <a:pPr algn="ctr" indent="0" marL="0">
+            <a:pPr eaLnBrk="0" algn="ctr" indent="0" marL="0">
               <a:buNone/>
             </a:pPr>
             <a:r>
@@ -11004,7 +11004,7 @@
           <a:bodyPr wrap="square" lIns="0" tIns="0" rIns="0" bIns="0" rtlCol="0" anchor="ctr"/>
           <a:lstStyle/>
           <a:p>
-            <a:pPr algn="l" indent="0" marL="0">
+            <a:pPr eaLnBrk="0" algn="l" indent="0" marL="0">
               <a:buNone/>
             </a:pPr>
             <a:r>
@@ -11051,7 +11051,7 @@
           <a:bodyPr wrap="square" lIns="0" tIns="0" rIns="0" bIns="0" rtlCol="0" anchor="ctr"/>
           <a:lstStyle/>
           <a:p>
-            <a:pPr algn="ctr" indent="0" marL="0">
+            <a:pPr eaLnBrk="0" algn="ctr" indent="0" marL="0">
               <a:buNone/>
             </a:pPr>
             <a:r>
@@ -11090,7 +11090,7 @@
           <a:bodyPr wrap="square" lIns="0" tIns="0" rIns="0" bIns="0" rtlCol="0" anchor="ctr"/>
           <a:lstStyle/>
           <a:p>
-            <a:pPr algn="l" indent="0" marL="0">
+            <a:pPr eaLnBrk="0" algn="l" indent="0" marL="0">
               <a:buNone/>
             </a:pPr>
             <a:r>
@@ -11137,7 +11137,7 @@
           <a:bodyPr wrap="square" lIns="0" tIns="0" rIns="0" bIns="0" rtlCol="0" anchor="ctr"/>
           <a:lstStyle/>
           <a:p>
-            <a:pPr algn="ctr" indent="0" marL="0">
+            <a:pPr eaLnBrk="0" algn="ctr" indent="0" marL="0">
               <a:buNone/>
             </a:pPr>
             <a:r>
@@ -11176,7 +11176,7 @@
           <a:bodyPr wrap="square" lIns="0" tIns="0" rIns="0" bIns="0" rtlCol="0" anchor="ctr"/>
           <a:lstStyle/>
           <a:p>
-            <a:pPr algn="l" indent="0" marL="0">
+            <a:pPr eaLnBrk="0" algn="l" indent="0" marL="0">
               <a:buNone/>
             </a:pPr>
             <a:r>
@@ -11233,7 +11233,7 @@
             </a:lvl1pPr>
           </a:lstStyle>
           <a:p>
-            <a:pPr algn="r"/>
+            <a:pPr eaLnBrk="0" algn="r"/>
             <a:fld id="{F7021451-1387-4CA6-816F-3879F97B5CBC}" type="slidenum">
               <a:rPr b="0" lang="en-US"/>
               <a:t>8</a:t>
@@ -11290,7 +11290,7 @@
           <a:bodyPr wrap="square" lIns="0" tIns="0" rIns="0" bIns="0" rtlCol="0" anchor="ctr"/>
           <a:lstStyle/>
           <a:p>
-            <a:pPr algn="l" indent="0" marL="0">
+            <a:pPr eaLnBrk="0" algn="l" indent="0" marL="0">
               <a:buNone/>
             </a:pPr>
             <a:r>
@@ -11356,7 +11356,7 @@
           <a:bodyPr wrap="square" lIns="0" tIns="0" rIns="0" bIns="0" rtlCol="0" anchor="ctr"/>
           <a:lstStyle/>
           <a:p>
-            <a:pPr indent="0" marL="0">
+            <a:pPr eaLnBrk="0" indent="0" marL="0">
               <a:spcAft>
                 <a:spcPts val="600"/>
               </a:spcAft>
@@ -11425,7 +11425,7 @@
           <a:bodyPr wrap="square" lIns="0" tIns="0" rIns="0" bIns="0" rtlCol="0" anchor="ctr"/>
           <a:lstStyle/>
           <a:p>
-            <a:pPr indent="0" marL="0">
+            <a:pPr eaLnBrk="0" indent="0" marL="0">
               <a:spcAft>
                 <a:spcPts val="600"/>
               </a:spcAft>
@@ -11475,7 +11475,7 @@
           <a:bodyPr wrap="square" lIns="177800" tIns="0" rIns="177800" bIns="0" rtlCol="0" anchor="ctr"/>
           <a:lstStyle/>
           <a:p>
-            <a:pPr algn="l" indent="0" marL="0">
+            <a:pPr eaLnBrk="0" algn="l" indent="0" marL="0">
               <a:buNone/>
             </a:pPr>
             <a:r>
@@ -11514,7 +11514,7 @@
           <a:bodyPr wrap="square" lIns="0" tIns="0" rIns="0" bIns="0" rtlCol="0" anchor="t"/>
           <a:lstStyle/>
           <a:p>
-            <a:pPr algn="l" indent="0" marL="0">
+            <a:pPr eaLnBrk="0" algn="l" indent="0" marL="0">
               <a:buNone/>
             </a:pPr>
             <a:r>
@@ -11531,7 +11531,7 @@
             <a:endParaRPr lang="ko-KR" sz="3200" dirty="0"/>
           </a:p>
           <a:p>
-            <a:pPr algn="l" indent="0" marL="0">
+            <a:pPr eaLnBrk="0" algn="l" indent="0" marL="0">
               <a:buNone/>
             </a:pPr>
             <a:r>
@@ -11578,7 +11578,7 @@
           <a:bodyPr wrap="square" lIns="177800" tIns="0" rIns="177800" bIns="0" rtlCol="0" anchor="ctr"/>
           <a:lstStyle/>
           <a:p>
-            <a:pPr algn="l" indent="0" marL="0">
+            <a:pPr eaLnBrk="0" algn="l" indent="0" marL="0">
               <a:buNone/>
             </a:pPr>
             <a:r>
@@ -11617,7 +11617,7 @@
           <a:bodyPr wrap="square" lIns="0" tIns="0" rIns="0" bIns="0" rtlCol="0" anchor="t"/>
           <a:lstStyle/>
           <a:p>
-            <a:pPr algn="l" indent="0" marL="0">
+            <a:pPr eaLnBrk="0" algn="l" indent="0" marL="0">
               <a:buNone/>
             </a:pPr>
             <a:r>
@@ -11634,7 +11634,7 @@
             <a:endParaRPr lang="ko-KR" sz="3200" dirty="0"/>
           </a:p>
           <a:p>
-            <a:pPr algn="l" indent="0" marL="0">
+            <a:pPr eaLnBrk="0" algn="l" indent="0" marL="0">
               <a:buNone/>
             </a:pPr>
             <a:r>
@@ -11691,7 +11691,7 @@
             </a:lvl1pPr>
           </a:lstStyle>
           <a:p>
-            <a:pPr algn="r"/>
+            <a:pPr eaLnBrk="0" algn="r"/>
             <a:fld id="{F7021451-1387-4CA6-816F-3879F97B5CBC}" type="slidenum">
               <a:rPr b="0" lang="en-US"/>
               <a:t>9</a:t>

--- a/dist/초1/수학/수와연산/초1_수학_수와연산_04_덧셈의뜻_학생용.pptx
+++ b/dist/초1/수학/수와연산/초1_수학_수와연산_04_덧셈의뜻_학생용.pptx
@@ -119,13 +119,13 @@
   <p:extLst>
     <p:ext uri="{521415D9-36F7-43E2-AB2F-B90AF26B5E84}">
       <p14:sectionLst xmlns:p14="http://schemas.microsoft.com/office/powerpoint/2010/main">
-        <p14:section name="도입" id="{fedad11f-4ba1-b62b-6d3b-4b6112694eef}">
+        <p14:section name="도입" id="{8e2367b5-b673-89eb-cb55-d24502bf20bd}">
           <p14:sldIdLst>
             <p14:sldId id="256"/>
             <p14:sldId id="257"/>
           </p14:sldIdLst>
         </p14:section>
-        <p14:section name="개념" id="{311e3316-1b65-00e2-d182-9ee0e98ac1e7}">
+        <p14:section name="개념" id="{ed87e085-4de5-4dde-0da9-b1d902fda9ef}">
           <p14:sldIdLst>
             <p14:sldId id="258"/>
             <p14:sldId id="259"/>
@@ -133,25 +133,25 @@
             <p14:sldId id="261"/>
           </p14:sldIdLst>
         </p14:section>
-        <p14:section name="연습" id="{16ec07b4-3e8d-f937-b604-a446353282c5}">
+        <p14:section name="연습" id="{40ccd337-415d-0831-5969-4a6631549f05}">
           <p14:sldIdLst>
             <p14:sldId id="262"/>
             <p14:sldId id="263"/>
             <p14:sldId id="264"/>
           </p14:sldIdLst>
         </p14:section>
-        <p14:section name="확인" id="{349db59c-80bf-8dae-4005-f5577f5a578b}">
+        <p14:section name="확인" id="{1019e91c-d687-582b-bec9-ae74fe332322}">
           <p14:sldIdLst>
             <p14:sldId id="265"/>
             <p14:sldId id="266"/>
           </p14:sldIdLst>
         </p14:section>
-        <p14:section name="정리" id="{dd264d6c-fa0d-d123-b4dc-355c9c7071be}">
+        <p14:section name="정리" id="{75058a74-c239-a5c5-bd18-c0e636f89e4d}">
           <p14:sldIdLst>
             <p14:sldId id="267"/>
           </p14:sldIdLst>
         </p14:section>
-        <p14:section name="보충" id="{0afcec30-8b8f-e4be-6aac-ecdbb552992e}">
+        <p14:section name="보충" id="{ff3a808d-be7a-6d49-3982-db65424900c5}">
           <p14:sldIdLst>
             <p14:sldId id="268"/>
           </p14:sldIdLst>
@@ -5081,7 +5081,7 @@
         </p:nvSpPr>
         <p:spPr>
           <a:xfrm>
-            <a:off x="548640" y="1773936"/>
+            <a:off x="548640" y="1796796"/>
             <a:ext cx="566928" cy="566928"/>
           </a:xfrm>
           <a:prstGeom prst="roundRect">
@@ -5129,7 +5129,7 @@
         <p:spPr>
           <a:xfrm>
             <a:off x="1344168" y="1325880"/>
-            <a:ext cx="4206240" cy="1463040"/>
+            <a:ext cx="5486400" cy="1508760"/>
           </a:xfrm>
           <a:prstGeom prst="rect">
             <a:avLst/>
@@ -5145,7 +5145,7 @@
               <a:buNone/>
             </a:pPr>
             <a:r>
-              <a:rPr lang="ko-KR" altLang="en-US" sz="2600" b="1" dirty="0">
+              <a:rPr lang="ko-KR" altLang="en-US" sz="3200" b="1" dirty="0">
                 <a:solidFill>
                   <a:srgbClr val="1F2937"/>
                 </a:solidFill>
@@ -5155,14 +5155,14 @@
               </a:rPr>
               <a:t>3        2</a:t>
             </a:r>
-            <a:endParaRPr lang="ko-KR" sz="2600" dirty="0"/>
+            <a:endParaRPr lang="ko-KR" sz="3200" dirty="0"/>
           </a:p>
           <a:p>
             <a:pPr eaLnBrk="0" algn="ctr" indent="0" marL="0">
               <a:buNone/>
             </a:pPr>
             <a:r>
-              <a:rPr lang="ko-KR" altLang="en-US" sz="2600" b="1" dirty="0">
+              <a:rPr lang="ko-KR" altLang="en-US" sz="3200" b="1" dirty="0">
                 <a:solidFill>
                   <a:srgbClr val="1F2937"/>
                 </a:solidFill>
@@ -5172,14 +5172,14 @@
               </a:rPr>
               <a:t>↘    ↙</a:t>
             </a:r>
-            <a:endParaRPr lang="ko-KR" sz="2600" dirty="0"/>
+            <a:endParaRPr lang="ko-KR" sz="3200" dirty="0"/>
           </a:p>
           <a:p>
             <a:pPr eaLnBrk="0" algn="ctr" indent="0" marL="0">
               <a:buNone/>
             </a:pPr>
             <a:r>
-              <a:rPr lang="ko-KR" altLang="en-US" sz="2600" b="1" dirty="0">
+              <a:rPr lang="ko-KR" altLang="en-US" sz="3200" b="1" dirty="0">
                 <a:solidFill>
                   <a:srgbClr val="1F2937"/>
                 </a:solidFill>
@@ -5189,7 +5189,7 @@
               </a:rPr>
               <a:t>□</a:t>
             </a:r>
-            <a:endParaRPr lang="ko-KR" sz="2600" dirty="0"/>
+            <a:endParaRPr lang="ko-KR" sz="3200" dirty="0"/>
           </a:p>
         </p:txBody>
       </p:sp>
@@ -5201,7 +5201,7 @@
         </p:nvSpPr>
         <p:spPr>
           <a:xfrm>
-            <a:off x="548640" y="3465576"/>
+            <a:off x="548640" y="3488436"/>
             <a:ext cx="566928" cy="566928"/>
           </a:xfrm>
           <a:prstGeom prst="roundRect">
@@ -5249,7 +5249,7 @@
         <p:spPr>
           <a:xfrm>
             <a:off x="1344168" y="3017520"/>
-            <a:ext cx="4206240" cy="1463040"/>
+            <a:ext cx="5486400" cy="1508760"/>
           </a:xfrm>
           <a:prstGeom prst="rect">
             <a:avLst/>
@@ -5265,7 +5265,7 @@
               <a:buNone/>
             </a:pPr>
             <a:r>
-              <a:rPr lang="ko-KR" altLang="en-US" sz="2600" b="1" dirty="0">
+              <a:rPr lang="ko-KR" altLang="en-US" sz="3200" b="1" dirty="0">
                 <a:solidFill>
                   <a:srgbClr val="1F2937"/>
                 </a:solidFill>
@@ -5275,14 +5275,14 @@
               </a:rPr>
               <a:t>7</a:t>
             </a:r>
-            <a:endParaRPr lang="ko-KR" sz="2600" dirty="0"/>
+            <a:endParaRPr lang="ko-KR" sz="3200" dirty="0"/>
           </a:p>
           <a:p>
             <a:pPr eaLnBrk="0" algn="ctr" indent="0" marL="0">
               <a:buNone/>
             </a:pPr>
             <a:r>
-              <a:rPr lang="ko-KR" altLang="en-US" sz="2600" b="1" dirty="0">
+              <a:rPr lang="ko-KR" altLang="en-US" sz="3200" b="1" dirty="0">
                 <a:solidFill>
                   <a:srgbClr val="1F2937"/>
                 </a:solidFill>
@@ -5292,14 +5292,14 @@
               </a:rPr>
               <a:t>↙    ↘</a:t>
             </a:r>
-            <a:endParaRPr lang="ko-KR" sz="2600" dirty="0"/>
+            <a:endParaRPr lang="ko-KR" sz="3200" dirty="0"/>
           </a:p>
           <a:p>
             <a:pPr eaLnBrk="0" algn="ctr" indent="0" marL="0">
               <a:buNone/>
             </a:pPr>
             <a:r>
-              <a:rPr lang="ko-KR" altLang="en-US" sz="2600" b="1" dirty="0">
+              <a:rPr lang="ko-KR" altLang="en-US" sz="3200" b="1" dirty="0">
                 <a:solidFill>
                   <a:srgbClr val="1F2937"/>
                 </a:solidFill>
@@ -5309,7 +5309,7 @@
               </a:rPr>
               <a:t>4        □</a:t>
             </a:r>
-            <a:endParaRPr lang="ko-KR" sz="2600" dirty="0"/>
+            <a:endParaRPr lang="ko-KR" sz="3200" dirty="0"/>
           </a:p>
         </p:txBody>
       </p:sp>
@@ -8394,8 +8394,8 @@
         </p:nvSpPr>
         <p:spPr>
           <a:xfrm>
-            <a:off x="1344168" y="2080260"/>
-            <a:ext cx="388620" cy="388620"/>
+            <a:off x="1492758" y="2011680"/>
+            <a:ext cx="457200" cy="457200"/>
           </a:xfrm>
           <a:prstGeom prst="rect">
             <a:avLst/>
@@ -8419,8 +8419,8 @@
         </p:nvSpPr>
         <p:spPr>
           <a:xfrm>
-            <a:off x="1410233" y="2146325"/>
-            <a:ext cx="256489" cy="256489"/>
+            <a:off x="1570482" y="2089404"/>
+            <a:ext cx="301752" cy="301752"/>
           </a:xfrm>
           <a:prstGeom prst="ellipse">
             <a:avLst/>
@@ -8444,8 +8444,8 @@
         </p:nvSpPr>
         <p:spPr>
           <a:xfrm>
-            <a:off x="1732788" y="2080260"/>
-            <a:ext cx="388620" cy="388620"/>
+            <a:off x="1949958" y="2011680"/>
+            <a:ext cx="457200" cy="457200"/>
           </a:xfrm>
           <a:prstGeom prst="rect">
             <a:avLst/>
@@ -8469,8 +8469,8 @@
         </p:nvSpPr>
         <p:spPr>
           <a:xfrm>
-            <a:off x="1798853" y="2146325"/>
-            <a:ext cx="256489" cy="256489"/>
+            <a:off x="2027682" y="2089404"/>
+            <a:ext cx="301752" cy="301752"/>
           </a:xfrm>
           <a:prstGeom prst="ellipse">
             <a:avLst/>
@@ -8494,8 +8494,8 @@
         </p:nvSpPr>
         <p:spPr>
           <a:xfrm>
-            <a:off x="2121408" y="2080260"/>
-            <a:ext cx="388620" cy="388620"/>
+            <a:off x="2407158" y="2011680"/>
+            <a:ext cx="457200" cy="457200"/>
           </a:xfrm>
           <a:prstGeom prst="rect">
             <a:avLst/>
@@ -8519,8 +8519,8 @@
         </p:nvSpPr>
         <p:spPr>
           <a:xfrm>
-            <a:off x="2510028" y="2080260"/>
-            <a:ext cx="388620" cy="388620"/>
+            <a:off x="2864358" y="2011680"/>
+            <a:ext cx="457200" cy="457200"/>
           </a:xfrm>
           <a:prstGeom prst="rect">
             <a:avLst/>
@@ -8544,8 +8544,8 @@
         </p:nvSpPr>
         <p:spPr>
           <a:xfrm>
-            <a:off x="2898648" y="2080260"/>
-            <a:ext cx="388620" cy="388620"/>
+            <a:off x="3321558" y="2011680"/>
+            <a:ext cx="457200" cy="457200"/>
           </a:xfrm>
           <a:prstGeom prst="rect">
             <a:avLst/>
@@ -8569,8 +8569,8 @@
         </p:nvSpPr>
         <p:spPr>
           <a:xfrm>
-            <a:off x="1344168" y="2468880"/>
-            <a:ext cx="388620" cy="388620"/>
+            <a:off x="1492758" y="2468880"/>
+            <a:ext cx="457200" cy="457200"/>
           </a:xfrm>
           <a:prstGeom prst="rect">
             <a:avLst/>
@@ -8594,8 +8594,8 @@
         </p:nvSpPr>
         <p:spPr>
           <a:xfrm>
-            <a:off x="1732788" y="2468880"/>
-            <a:ext cx="388620" cy="388620"/>
+            <a:off x="1949958" y="2468880"/>
+            <a:ext cx="457200" cy="457200"/>
           </a:xfrm>
           <a:prstGeom prst="rect">
             <a:avLst/>
@@ -8619,8 +8619,8 @@
         </p:nvSpPr>
         <p:spPr>
           <a:xfrm>
-            <a:off x="2121408" y="2468880"/>
-            <a:ext cx="388620" cy="388620"/>
+            <a:off x="2407158" y="2468880"/>
+            <a:ext cx="457200" cy="457200"/>
           </a:xfrm>
           <a:prstGeom prst="rect">
             <a:avLst/>
@@ -8644,8 +8644,8 @@
         </p:nvSpPr>
         <p:spPr>
           <a:xfrm>
-            <a:off x="2510028" y="2468880"/>
-            <a:ext cx="388620" cy="388620"/>
+            <a:off x="2864358" y="2468880"/>
+            <a:ext cx="457200" cy="457200"/>
           </a:xfrm>
           <a:prstGeom prst="rect">
             <a:avLst/>
@@ -8669,8 +8669,8 @@
         </p:nvSpPr>
         <p:spPr>
           <a:xfrm>
-            <a:off x="2898648" y="2468880"/>
-            <a:ext cx="388620" cy="388620"/>
+            <a:off x="3321558" y="2468880"/>
+            <a:ext cx="457200" cy="457200"/>
           </a:xfrm>
           <a:prstGeom prst="rect">
             <a:avLst/>
@@ -8694,8 +8694,8 @@
         </p:nvSpPr>
         <p:spPr>
           <a:xfrm>
-            <a:off x="1344168" y="2080260"/>
-            <a:ext cx="1943100" cy="777240"/>
+            <a:off x="1492758" y="2011680"/>
+            <a:ext cx="2286000" cy="914400"/>
           </a:xfrm>
           <a:prstGeom prst="rect">
             <a:avLst/>
@@ -8721,8 +8721,8 @@
         </p:nvSpPr>
         <p:spPr>
           <a:xfrm>
-            <a:off x="3607308" y="2080260"/>
-            <a:ext cx="388620" cy="388620"/>
+            <a:off x="4395978" y="2011680"/>
+            <a:ext cx="457200" cy="457200"/>
           </a:xfrm>
           <a:prstGeom prst="rect">
             <a:avLst/>
@@ -8746,8 +8746,8 @@
         </p:nvSpPr>
         <p:spPr>
           <a:xfrm>
-            <a:off x="3673373" y="2146325"/>
-            <a:ext cx="256489" cy="256489"/>
+            <a:off x="4473702" y="2089404"/>
+            <a:ext cx="301752" cy="301752"/>
           </a:xfrm>
           <a:prstGeom prst="ellipse">
             <a:avLst/>
@@ -8771,8 +8771,8 @@
         </p:nvSpPr>
         <p:spPr>
           <a:xfrm>
-            <a:off x="3995928" y="2080260"/>
-            <a:ext cx="388620" cy="388620"/>
+            <a:off x="4853178" y="2011680"/>
+            <a:ext cx="457200" cy="457200"/>
           </a:xfrm>
           <a:prstGeom prst="rect">
             <a:avLst/>
@@ -8796,8 +8796,8 @@
         </p:nvSpPr>
         <p:spPr>
           <a:xfrm>
-            <a:off x="4061993" y="2146325"/>
-            <a:ext cx="256489" cy="256489"/>
+            <a:off x="4930902" y="2089404"/>
+            <a:ext cx="301752" cy="301752"/>
           </a:xfrm>
           <a:prstGeom prst="ellipse">
             <a:avLst/>
@@ -8821,8 +8821,8 @@
         </p:nvSpPr>
         <p:spPr>
           <a:xfrm>
-            <a:off x="4384548" y="2080260"/>
-            <a:ext cx="388620" cy="388620"/>
+            <a:off x="5310378" y="2011680"/>
+            <a:ext cx="457200" cy="457200"/>
           </a:xfrm>
           <a:prstGeom prst="rect">
             <a:avLst/>
@@ -8846,8 +8846,8 @@
         </p:nvSpPr>
         <p:spPr>
           <a:xfrm>
-            <a:off x="4450613" y="2146325"/>
-            <a:ext cx="256489" cy="256489"/>
+            <a:off x="5388102" y="2089404"/>
+            <a:ext cx="301752" cy="301752"/>
           </a:xfrm>
           <a:prstGeom prst="ellipse">
             <a:avLst/>
@@ -8871,8 +8871,8 @@
         </p:nvSpPr>
         <p:spPr>
           <a:xfrm>
-            <a:off x="4773168" y="2080260"/>
-            <a:ext cx="388620" cy="388620"/>
+            <a:off x="5767578" y="2011680"/>
+            <a:ext cx="457200" cy="457200"/>
           </a:xfrm>
           <a:prstGeom prst="rect">
             <a:avLst/>
@@ -8896,8 +8896,8 @@
         </p:nvSpPr>
         <p:spPr>
           <a:xfrm>
-            <a:off x="4839233" y="2146325"/>
-            <a:ext cx="256489" cy="256489"/>
+            <a:off x="5845302" y="2089404"/>
+            <a:ext cx="301752" cy="301752"/>
           </a:xfrm>
           <a:prstGeom prst="ellipse">
             <a:avLst/>
@@ -8921,8 +8921,8 @@
         </p:nvSpPr>
         <p:spPr>
           <a:xfrm>
-            <a:off x="5161788" y="2080260"/>
-            <a:ext cx="388620" cy="388620"/>
+            <a:off x="6224778" y="2011680"/>
+            <a:ext cx="457200" cy="457200"/>
           </a:xfrm>
           <a:prstGeom prst="rect">
             <a:avLst/>
@@ -8946,8 +8946,8 @@
         </p:nvSpPr>
         <p:spPr>
           <a:xfrm>
-            <a:off x="3607308" y="2468880"/>
-            <a:ext cx="388620" cy="388620"/>
+            <a:off x="4395978" y="2468880"/>
+            <a:ext cx="457200" cy="457200"/>
           </a:xfrm>
           <a:prstGeom prst="rect">
             <a:avLst/>
@@ -8971,8 +8971,8 @@
         </p:nvSpPr>
         <p:spPr>
           <a:xfrm>
-            <a:off x="3995928" y="2468880"/>
-            <a:ext cx="388620" cy="388620"/>
+            <a:off x="4853178" y="2468880"/>
+            <a:ext cx="457200" cy="457200"/>
           </a:xfrm>
           <a:prstGeom prst="rect">
             <a:avLst/>
@@ -8996,8 +8996,8 @@
         </p:nvSpPr>
         <p:spPr>
           <a:xfrm>
-            <a:off x="4384548" y="2468880"/>
-            <a:ext cx="388620" cy="388620"/>
+            <a:off x="5310378" y="2468880"/>
+            <a:ext cx="457200" cy="457200"/>
           </a:xfrm>
           <a:prstGeom prst="rect">
             <a:avLst/>
@@ -9021,8 +9021,8 @@
         </p:nvSpPr>
         <p:spPr>
           <a:xfrm>
-            <a:off x="4773168" y="2468880"/>
-            <a:ext cx="388620" cy="388620"/>
+            <a:off x="5767578" y="2468880"/>
+            <a:ext cx="457200" cy="457200"/>
           </a:xfrm>
           <a:prstGeom prst="rect">
             <a:avLst/>
@@ -9046,8 +9046,8 @@
         </p:nvSpPr>
         <p:spPr>
           <a:xfrm>
-            <a:off x="5161788" y="2468880"/>
-            <a:ext cx="388620" cy="388620"/>
+            <a:off x="6224778" y="2468880"/>
+            <a:ext cx="457200" cy="457200"/>
           </a:xfrm>
           <a:prstGeom prst="rect">
             <a:avLst/>
@@ -9071,8 +9071,8 @@
         </p:nvSpPr>
         <p:spPr>
           <a:xfrm>
-            <a:off x="3607308" y="2080260"/>
-            <a:ext cx="1943100" cy="777240"/>
+            <a:off x="4395978" y="2011680"/>
+            <a:ext cx="2286000" cy="914400"/>
           </a:xfrm>
           <a:prstGeom prst="rect">
             <a:avLst/>
@@ -9145,8 +9145,8 @@
         </p:nvSpPr>
         <p:spPr>
           <a:xfrm>
-            <a:off x="1344168" y="3177540"/>
-            <a:ext cx="388620" cy="388620"/>
+            <a:off x="1492758" y="3108960"/>
+            <a:ext cx="457200" cy="457200"/>
           </a:xfrm>
           <a:prstGeom prst="rect">
             <a:avLst/>
@@ -9170,8 +9170,8 @@
         </p:nvSpPr>
         <p:spPr>
           <a:xfrm>
-            <a:off x="1410233" y="3243605"/>
-            <a:ext cx="256489" cy="256489"/>
+            <a:off x="1570482" y="3186684"/>
+            <a:ext cx="301752" cy="301752"/>
           </a:xfrm>
           <a:prstGeom prst="ellipse">
             <a:avLst/>
@@ -9195,8 +9195,8 @@
         </p:nvSpPr>
         <p:spPr>
           <a:xfrm>
-            <a:off x="1732788" y="3177540"/>
-            <a:ext cx="388620" cy="388620"/>
+            <a:off x="1949958" y="3108960"/>
+            <a:ext cx="457200" cy="457200"/>
           </a:xfrm>
           <a:prstGeom prst="rect">
             <a:avLst/>
@@ -9220,8 +9220,8 @@
         </p:nvSpPr>
         <p:spPr>
           <a:xfrm>
-            <a:off x="1798853" y="3243605"/>
-            <a:ext cx="256489" cy="256489"/>
+            <a:off x="2027682" y="3186684"/>
+            <a:ext cx="301752" cy="301752"/>
           </a:xfrm>
           <a:prstGeom prst="ellipse">
             <a:avLst/>
@@ -9245,8 +9245,8 @@
         </p:nvSpPr>
         <p:spPr>
           <a:xfrm>
-            <a:off x="2121408" y="3177540"/>
-            <a:ext cx="388620" cy="388620"/>
+            <a:off x="2407158" y="3108960"/>
+            <a:ext cx="457200" cy="457200"/>
           </a:xfrm>
           <a:prstGeom prst="rect">
             <a:avLst/>
@@ -9270,8 +9270,8 @@
         </p:nvSpPr>
         <p:spPr>
           <a:xfrm>
-            <a:off x="2187473" y="3243605"/>
-            <a:ext cx="256489" cy="256489"/>
+            <a:off x="2484882" y="3186684"/>
+            <a:ext cx="301752" cy="301752"/>
           </a:xfrm>
           <a:prstGeom prst="ellipse">
             <a:avLst/>
@@ -9295,8 +9295,8 @@
         </p:nvSpPr>
         <p:spPr>
           <a:xfrm>
-            <a:off x="2510028" y="3177540"/>
-            <a:ext cx="388620" cy="388620"/>
+            <a:off x="2864358" y="3108960"/>
+            <a:ext cx="457200" cy="457200"/>
           </a:xfrm>
           <a:prstGeom prst="rect">
             <a:avLst/>
@@ -9320,8 +9320,8 @@
         </p:nvSpPr>
         <p:spPr>
           <a:xfrm>
-            <a:off x="2576093" y="3243605"/>
-            <a:ext cx="256489" cy="256489"/>
+            <a:off x="2942082" y="3186684"/>
+            <a:ext cx="301752" cy="301752"/>
           </a:xfrm>
           <a:prstGeom prst="ellipse">
             <a:avLst/>
@@ -9345,8 +9345,8 @@
         </p:nvSpPr>
         <p:spPr>
           <a:xfrm>
-            <a:off x="2898648" y="3177540"/>
-            <a:ext cx="388620" cy="388620"/>
+            <a:off x="3321558" y="3108960"/>
+            <a:ext cx="457200" cy="457200"/>
           </a:xfrm>
           <a:prstGeom prst="rect">
             <a:avLst/>
@@ -9370,8 +9370,8 @@
         </p:nvSpPr>
         <p:spPr>
           <a:xfrm>
-            <a:off x="2964713" y="3243605"/>
-            <a:ext cx="256489" cy="256489"/>
+            <a:off x="3399282" y="3186684"/>
+            <a:ext cx="301752" cy="301752"/>
           </a:xfrm>
           <a:prstGeom prst="ellipse">
             <a:avLst/>
@@ -9395,8 +9395,8 @@
         </p:nvSpPr>
         <p:spPr>
           <a:xfrm>
-            <a:off x="1344168" y="3566160"/>
-            <a:ext cx="388620" cy="388620"/>
+            <a:off x="1492758" y="3566160"/>
+            <a:ext cx="457200" cy="457200"/>
           </a:xfrm>
           <a:prstGeom prst="rect">
             <a:avLst/>
@@ -9420,8 +9420,8 @@
         </p:nvSpPr>
         <p:spPr>
           <a:xfrm>
-            <a:off x="1732788" y="3566160"/>
-            <a:ext cx="388620" cy="388620"/>
+            <a:off x="1949958" y="3566160"/>
+            <a:ext cx="457200" cy="457200"/>
           </a:xfrm>
           <a:prstGeom prst="rect">
             <a:avLst/>
@@ -9445,8 +9445,8 @@
         </p:nvSpPr>
         <p:spPr>
           <a:xfrm>
-            <a:off x="2121408" y="3566160"/>
-            <a:ext cx="388620" cy="388620"/>
+            <a:off x="2407158" y="3566160"/>
+            <a:ext cx="457200" cy="457200"/>
           </a:xfrm>
           <a:prstGeom prst="rect">
             <a:avLst/>
@@ -9470,8 +9470,8 @@
         </p:nvSpPr>
         <p:spPr>
           <a:xfrm>
-            <a:off x="2510028" y="3566160"/>
-            <a:ext cx="388620" cy="388620"/>
+            <a:off x="2864358" y="3566160"/>
+            <a:ext cx="457200" cy="457200"/>
           </a:xfrm>
           <a:prstGeom prst="rect">
             <a:avLst/>
@@ -9495,8 +9495,8 @@
         </p:nvSpPr>
         <p:spPr>
           <a:xfrm>
-            <a:off x="2898648" y="3566160"/>
-            <a:ext cx="388620" cy="388620"/>
+            <a:off x="3321558" y="3566160"/>
+            <a:ext cx="457200" cy="457200"/>
           </a:xfrm>
           <a:prstGeom prst="rect">
             <a:avLst/>
@@ -9520,8 +9520,8 @@
         </p:nvSpPr>
         <p:spPr>
           <a:xfrm>
-            <a:off x="1344168" y="3177540"/>
-            <a:ext cx="1943100" cy="777240"/>
+            <a:off x="1492758" y="3108960"/>
+            <a:ext cx="2286000" cy="914400"/>
           </a:xfrm>
           <a:prstGeom prst="rect">
             <a:avLst/>
@@ -9547,8 +9547,8 @@
         </p:nvSpPr>
         <p:spPr>
           <a:xfrm>
-            <a:off x="3607308" y="3177540"/>
-            <a:ext cx="388620" cy="388620"/>
+            <a:off x="4395978" y="3108960"/>
+            <a:ext cx="457200" cy="457200"/>
           </a:xfrm>
           <a:prstGeom prst="rect">
             <a:avLst/>
@@ -9572,8 +9572,8 @@
         </p:nvSpPr>
         <p:spPr>
           <a:xfrm>
-            <a:off x="3673373" y="3243605"/>
-            <a:ext cx="256489" cy="256489"/>
+            <a:off x="4473702" y="3186684"/>
+            <a:ext cx="301752" cy="301752"/>
           </a:xfrm>
           <a:prstGeom prst="ellipse">
             <a:avLst/>
@@ -9597,8 +9597,8 @@
         </p:nvSpPr>
         <p:spPr>
           <a:xfrm>
-            <a:off x="3995928" y="3177540"/>
-            <a:ext cx="388620" cy="388620"/>
+            <a:off x="4853178" y="3108960"/>
+            <a:ext cx="457200" cy="457200"/>
           </a:xfrm>
           <a:prstGeom prst="rect">
             <a:avLst/>
@@ -9622,8 +9622,8 @@
         </p:nvSpPr>
         <p:spPr>
           <a:xfrm>
-            <a:off x="4061993" y="3243605"/>
-            <a:ext cx="256489" cy="256489"/>
+            <a:off x="4930902" y="3186684"/>
+            <a:ext cx="301752" cy="301752"/>
           </a:xfrm>
           <a:prstGeom prst="ellipse">
             <a:avLst/>
@@ -9647,8 +9647,8 @@
         </p:nvSpPr>
         <p:spPr>
           <a:xfrm>
-            <a:off x="4384548" y="3177540"/>
-            <a:ext cx="388620" cy="388620"/>
+            <a:off x="5310378" y="3108960"/>
+            <a:ext cx="457200" cy="457200"/>
           </a:xfrm>
           <a:prstGeom prst="rect">
             <a:avLst/>
@@ -9672,8 +9672,8 @@
         </p:nvSpPr>
         <p:spPr>
           <a:xfrm>
-            <a:off x="4450613" y="3243605"/>
-            <a:ext cx="256489" cy="256489"/>
+            <a:off x="5388102" y="3186684"/>
+            <a:ext cx="301752" cy="301752"/>
           </a:xfrm>
           <a:prstGeom prst="ellipse">
             <a:avLst/>
@@ -9697,8 +9697,8 @@
         </p:nvSpPr>
         <p:spPr>
           <a:xfrm>
-            <a:off x="4773168" y="3177540"/>
-            <a:ext cx="388620" cy="388620"/>
+            <a:off x="5767578" y="3108960"/>
+            <a:ext cx="457200" cy="457200"/>
           </a:xfrm>
           <a:prstGeom prst="rect">
             <a:avLst/>
@@ -9722,8 +9722,8 @@
         </p:nvSpPr>
         <p:spPr>
           <a:xfrm>
-            <a:off x="5161788" y="3177540"/>
-            <a:ext cx="388620" cy="388620"/>
+            <a:off x="6224778" y="3108960"/>
+            <a:ext cx="457200" cy="457200"/>
           </a:xfrm>
           <a:prstGeom prst="rect">
             <a:avLst/>
@@ -9747,8 +9747,8 @@
         </p:nvSpPr>
         <p:spPr>
           <a:xfrm>
-            <a:off x="3607308" y="3566160"/>
-            <a:ext cx="388620" cy="388620"/>
+            <a:off x="4395978" y="3566160"/>
+            <a:ext cx="457200" cy="457200"/>
           </a:xfrm>
           <a:prstGeom prst="rect">
             <a:avLst/>
@@ -9772,8 +9772,8 @@
         </p:nvSpPr>
         <p:spPr>
           <a:xfrm>
-            <a:off x="3995928" y="3566160"/>
-            <a:ext cx="388620" cy="388620"/>
+            <a:off x="4853178" y="3566160"/>
+            <a:ext cx="457200" cy="457200"/>
           </a:xfrm>
           <a:prstGeom prst="rect">
             <a:avLst/>
@@ -9797,8 +9797,8 @@
         </p:nvSpPr>
         <p:spPr>
           <a:xfrm>
-            <a:off x="4384548" y="3566160"/>
-            <a:ext cx="388620" cy="388620"/>
+            <a:off x="5310378" y="3566160"/>
+            <a:ext cx="457200" cy="457200"/>
           </a:xfrm>
           <a:prstGeom prst="rect">
             <a:avLst/>
@@ -9822,8 +9822,8 @@
         </p:nvSpPr>
         <p:spPr>
           <a:xfrm>
-            <a:off x="4773168" y="3566160"/>
-            <a:ext cx="388620" cy="388620"/>
+            <a:off x="5767578" y="3566160"/>
+            <a:ext cx="457200" cy="457200"/>
           </a:xfrm>
           <a:prstGeom prst="rect">
             <a:avLst/>
@@ -9847,8 +9847,8 @@
         </p:nvSpPr>
         <p:spPr>
           <a:xfrm>
-            <a:off x="5161788" y="3566160"/>
-            <a:ext cx="388620" cy="388620"/>
+            <a:off x="6224778" y="3566160"/>
+            <a:ext cx="457200" cy="457200"/>
           </a:xfrm>
           <a:prstGeom prst="rect">
             <a:avLst/>
@@ -9872,8 +9872,8 @@
         </p:nvSpPr>
         <p:spPr>
           <a:xfrm>
-            <a:off x="3607308" y="3177540"/>
-            <a:ext cx="1943100" cy="777240"/>
+            <a:off x="4395978" y="3108960"/>
+            <a:ext cx="2286000" cy="914400"/>
           </a:xfrm>
           <a:prstGeom prst="rect">
             <a:avLst/>
@@ -9946,8 +9946,8 @@
         </p:nvSpPr>
         <p:spPr>
           <a:xfrm>
-            <a:off x="1344168" y="4274820"/>
-            <a:ext cx="388620" cy="388620"/>
+            <a:off x="1492758" y="4206240"/>
+            <a:ext cx="457200" cy="457200"/>
           </a:xfrm>
           <a:prstGeom prst="rect">
             <a:avLst/>
@@ -9971,8 +9971,8 @@
         </p:nvSpPr>
         <p:spPr>
           <a:xfrm>
-            <a:off x="1410233" y="4340885"/>
-            <a:ext cx="256489" cy="256489"/>
+            <a:off x="1570482" y="4283964"/>
+            <a:ext cx="301752" cy="301752"/>
           </a:xfrm>
           <a:prstGeom prst="ellipse">
             <a:avLst/>
@@ -9996,8 +9996,8 @@
         </p:nvSpPr>
         <p:spPr>
           <a:xfrm>
-            <a:off x="1732788" y="4274820"/>
-            <a:ext cx="388620" cy="388620"/>
+            <a:off x="1949958" y="4206240"/>
+            <a:ext cx="457200" cy="457200"/>
           </a:xfrm>
           <a:prstGeom prst="rect">
             <a:avLst/>
@@ -10021,8 +10021,8 @@
         </p:nvSpPr>
         <p:spPr>
           <a:xfrm>
-            <a:off x="2121408" y="4274820"/>
-            <a:ext cx="388620" cy="388620"/>
+            <a:off x="2407158" y="4206240"/>
+            <a:ext cx="457200" cy="457200"/>
           </a:xfrm>
           <a:prstGeom prst="rect">
             <a:avLst/>
@@ -10046,8 +10046,8 @@
         </p:nvSpPr>
         <p:spPr>
           <a:xfrm>
-            <a:off x="2510028" y="4274820"/>
-            <a:ext cx="388620" cy="388620"/>
+            <a:off x="2864358" y="4206240"/>
+            <a:ext cx="457200" cy="457200"/>
           </a:xfrm>
           <a:prstGeom prst="rect">
             <a:avLst/>
@@ -10071,8 +10071,8 @@
         </p:nvSpPr>
         <p:spPr>
           <a:xfrm>
-            <a:off x="2898648" y="4274820"/>
-            <a:ext cx="388620" cy="388620"/>
+            <a:off x="3321558" y="4206240"/>
+            <a:ext cx="457200" cy="457200"/>
           </a:xfrm>
           <a:prstGeom prst="rect">
             <a:avLst/>
@@ -10096,8 +10096,8 @@
         </p:nvSpPr>
         <p:spPr>
           <a:xfrm>
-            <a:off x="1344168" y="4663440"/>
-            <a:ext cx="388620" cy="388620"/>
+            <a:off x="1492758" y="4663440"/>
+            <a:ext cx="457200" cy="457200"/>
           </a:xfrm>
           <a:prstGeom prst="rect">
             <a:avLst/>
@@ -10121,8 +10121,8 @@
         </p:nvSpPr>
         <p:spPr>
           <a:xfrm>
-            <a:off x="1732788" y="4663440"/>
-            <a:ext cx="388620" cy="388620"/>
+            <a:off x="1949958" y="4663440"/>
+            <a:ext cx="457200" cy="457200"/>
           </a:xfrm>
           <a:prstGeom prst="rect">
             <a:avLst/>
@@ -10146,8 +10146,8 @@
         </p:nvSpPr>
         <p:spPr>
           <a:xfrm>
-            <a:off x="2121408" y="4663440"/>
-            <a:ext cx="388620" cy="388620"/>
+            <a:off x="2407158" y="4663440"/>
+            <a:ext cx="457200" cy="457200"/>
           </a:xfrm>
           <a:prstGeom prst="rect">
             <a:avLst/>
@@ -10171,8 +10171,8 @@
         </p:nvSpPr>
         <p:spPr>
           <a:xfrm>
-            <a:off x="2510028" y="4663440"/>
-            <a:ext cx="388620" cy="388620"/>
+            <a:off x="2864358" y="4663440"/>
+            <a:ext cx="457200" cy="457200"/>
           </a:xfrm>
           <a:prstGeom prst="rect">
             <a:avLst/>
@@ -10196,8 +10196,8 @@
         </p:nvSpPr>
         <p:spPr>
           <a:xfrm>
-            <a:off x="2898648" y="4663440"/>
-            <a:ext cx="388620" cy="388620"/>
+            <a:off x="3321558" y="4663440"/>
+            <a:ext cx="457200" cy="457200"/>
           </a:xfrm>
           <a:prstGeom prst="rect">
             <a:avLst/>
@@ -10221,8 +10221,8 @@
         </p:nvSpPr>
         <p:spPr>
           <a:xfrm>
-            <a:off x="1344168" y="4274820"/>
-            <a:ext cx="1943100" cy="777240"/>
+            <a:off x="1492758" y="4206240"/>
+            <a:ext cx="2286000" cy="914400"/>
           </a:xfrm>
           <a:prstGeom prst="rect">
             <a:avLst/>
@@ -10248,8 +10248,8 @@
         </p:nvSpPr>
         <p:spPr>
           <a:xfrm>
-            <a:off x="3607308" y="4274820"/>
-            <a:ext cx="388620" cy="388620"/>
+            <a:off x="4395978" y="4206240"/>
+            <a:ext cx="457200" cy="457200"/>
           </a:xfrm>
           <a:prstGeom prst="rect">
             <a:avLst/>
@@ -10273,8 +10273,8 @@
         </p:nvSpPr>
         <p:spPr>
           <a:xfrm>
-            <a:off x="3673373" y="4340885"/>
-            <a:ext cx="256489" cy="256489"/>
+            <a:off x="4473702" y="4283964"/>
+            <a:ext cx="301752" cy="301752"/>
           </a:xfrm>
           <a:prstGeom prst="ellipse">
             <a:avLst/>
@@ -10298,8 +10298,8 @@
         </p:nvSpPr>
         <p:spPr>
           <a:xfrm>
-            <a:off x="3995928" y="4274820"/>
-            <a:ext cx="388620" cy="388620"/>
+            <a:off x="4853178" y="4206240"/>
+            <a:ext cx="457200" cy="457200"/>
           </a:xfrm>
           <a:prstGeom prst="rect">
             <a:avLst/>
@@ -10323,8 +10323,8 @@
         </p:nvSpPr>
         <p:spPr>
           <a:xfrm>
-            <a:off x="4061993" y="4340885"/>
-            <a:ext cx="256489" cy="256489"/>
+            <a:off x="4930902" y="4283964"/>
+            <a:ext cx="301752" cy="301752"/>
           </a:xfrm>
           <a:prstGeom prst="ellipse">
             <a:avLst/>
@@ -10348,8 +10348,8 @@
         </p:nvSpPr>
         <p:spPr>
           <a:xfrm>
-            <a:off x="4384548" y="4274820"/>
-            <a:ext cx="388620" cy="388620"/>
+            <a:off x="5310378" y="4206240"/>
+            <a:ext cx="457200" cy="457200"/>
           </a:xfrm>
           <a:prstGeom prst="rect">
             <a:avLst/>
@@ -10373,8 +10373,8 @@
         </p:nvSpPr>
         <p:spPr>
           <a:xfrm>
-            <a:off x="4450613" y="4340885"/>
-            <a:ext cx="256489" cy="256489"/>
+            <a:off x="5388102" y="4283964"/>
+            <a:ext cx="301752" cy="301752"/>
           </a:xfrm>
           <a:prstGeom prst="ellipse">
             <a:avLst/>
@@ -10398,8 +10398,8 @@
         </p:nvSpPr>
         <p:spPr>
           <a:xfrm>
-            <a:off x="4773168" y="4274820"/>
-            <a:ext cx="388620" cy="388620"/>
+            <a:off x="5767578" y="4206240"/>
+            <a:ext cx="457200" cy="457200"/>
           </a:xfrm>
           <a:prstGeom prst="rect">
             <a:avLst/>
@@ -10423,8 +10423,8 @@
         </p:nvSpPr>
         <p:spPr>
           <a:xfrm>
-            <a:off x="4839233" y="4340885"/>
-            <a:ext cx="256489" cy="256489"/>
+            <a:off x="5845302" y="4283964"/>
+            <a:ext cx="301752" cy="301752"/>
           </a:xfrm>
           <a:prstGeom prst="ellipse">
             <a:avLst/>
@@ -10448,8 +10448,8 @@
         </p:nvSpPr>
         <p:spPr>
           <a:xfrm>
-            <a:off x="5161788" y="4274820"/>
-            <a:ext cx="388620" cy="388620"/>
+            <a:off x="6224778" y="4206240"/>
+            <a:ext cx="457200" cy="457200"/>
           </a:xfrm>
           <a:prstGeom prst="rect">
             <a:avLst/>
@@ -10473,8 +10473,8 @@
         </p:nvSpPr>
         <p:spPr>
           <a:xfrm>
-            <a:off x="5227853" y="4340885"/>
-            <a:ext cx="256489" cy="256489"/>
+            <a:off x="6302502" y="4283964"/>
+            <a:ext cx="301752" cy="301752"/>
           </a:xfrm>
           <a:prstGeom prst="ellipse">
             <a:avLst/>
@@ -10498,8 +10498,8 @@
         </p:nvSpPr>
         <p:spPr>
           <a:xfrm>
-            <a:off x="3607308" y="4663440"/>
-            <a:ext cx="388620" cy="388620"/>
+            <a:off x="4395978" y="4663440"/>
+            <a:ext cx="457200" cy="457200"/>
           </a:xfrm>
           <a:prstGeom prst="rect">
             <a:avLst/>
@@ -10523,8 +10523,8 @@
         </p:nvSpPr>
         <p:spPr>
           <a:xfrm>
-            <a:off x="3673373" y="4729505"/>
-            <a:ext cx="256489" cy="256489"/>
+            <a:off x="4473702" y="4741164"/>
+            <a:ext cx="301752" cy="301752"/>
           </a:xfrm>
           <a:prstGeom prst="ellipse">
             <a:avLst/>
@@ -10548,8 +10548,8 @@
         </p:nvSpPr>
         <p:spPr>
           <a:xfrm>
-            <a:off x="3995928" y="4663440"/>
-            <a:ext cx="388620" cy="388620"/>
+            <a:off x="4853178" y="4663440"/>
+            <a:ext cx="457200" cy="457200"/>
           </a:xfrm>
           <a:prstGeom prst="rect">
             <a:avLst/>
@@ -10573,8 +10573,8 @@
         </p:nvSpPr>
         <p:spPr>
           <a:xfrm>
-            <a:off x="4384548" y="4663440"/>
-            <a:ext cx="388620" cy="388620"/>
+            <a:off x="5310378" y="4663440"/>
+            <a:ext cx="457200" cy="457200"/>
           </a:xfrm>
           <a:prstGeom prst="rect">
             <a:avLst/>
@@ -10598,8 +10598,8 @@
         </p:nvSpPr>
         <p:spPr>
           <a:xfrm>
-            <a:off x="4773168" y="4663440"/>
-            <a:ext cx="388620" cy="388620"/>
+            <a:off x="5767578" y="4663440"/>
+            <a:ext cx="457200" cy="457200"/>
           </a:xfrm>
           <a:prstGeom prst="rect">
             <a:avLst/>
@@ -10623,8 +10623,8 @@
         </p:nvSpPr>
         <p:spPr>
           <a:xfrm>
-            <a:off x="5161788" y="4663440"/>
-            <a:ext cx="388620" cy="388620"/>
+            <a:off x="6224778" y="4663440"/>
+            <a:ext cx="457200" cy="457200"/>
           </a:xfrm>
           <a:prstGeom prst="rect">
             <a:avLst/>
@@ -10648,8 +10648,8 @@
         </p:nvSpPr>
         <p:spPr>
           <a:xfrm>
-            <a:off x="3607308" y="4274820"/>
-            <a:ext cx="1943100" cy="777240"/>
+            <a:off x="4395978" y="4206240"/>
+            <a:ext cx="2286000" cy="914400"/>
           </a:xfrm>
           <a:prstGeom prst="rect">
             <a:avLst/>

--- a/dist/초1/수학/수와연산/초1_수학_수와연산_04_덧셈의뜻_학생용.pptx
+++ b/dist/초1/수학/수와연산/초1_수학_수와연산_04_덧셈의뜻_학생용.pptx
@@ -119,13 +119,13 @@
   <p:extLst>
     <p:ext uri="{521415D9-36F7-43E2-AB2F-B90AF26B5E84}">
       <p14:sectionLst xmlns:p14="http://schemas.microsoft.com/office/powerpoint/2010/main">
-        <p14:section name="도입" id="{8e2367b5-b673-89eb-cb55-d24502bf20bd}">
+        <p14:section name="도입" id="{35af2c54-f5b4-7416-349c-20ff80f08735}">
           <p14:sldIdLst>
             <p14:sldId id="256"/>
             <p14:sldId id="257"/>
           </p14:sldIdLst>
         </p14:section>
-        <p14:section name="개념" id="{ed87e085-4de5-4dde-0da9-b1d902fda9ef}">
+        <p14:section name="개념" id="{358449c8-8ff9-b880-727e-d3c45b1fead9}">
           <p14:sldIdLst>
             <p14:sldId id="258"/>
             <p14:sldId id="259"/>
@@ -133,25 +133,25 @@
             <p14:sldId id="261"/>
           </p14:sldIdLst>
         </p14:section>
-        <p14:section name="연습" id="{40ccd337-415d-0831-5969-4a6631549f05}">
+        <p14:section name="연습" id="{ec0e5e6c-6e11-1006-98da-8e155fa481ee}">
           <p14:sldIdLst>
             <p14:sldId id="262"/>
             <p14:sldId id="263"/>
             <p14:sldId id="264"/>
           </p14:sldIdLst>
         </p14:section>
-        <p14:section name="확인" id="{1019e91c-d687-582b-bec9-ae74fe332322}">
+        <p14:section name="확인" id="{7c00e5e2-baaa-d1bf-f64c-23e2bca6454c}">
           <p14:sldIdLst>
             <p14:sldId id="265"/>
             <p14:sldId id="266"/>
           </p14:sldIdLst>
         </p14:section>
-        <p14:section name="정리" id="{75058a74-c239-a5c5-bd18-c0e636f89e4d}">
+        <p14:section name="정리" id="{d989dd98-1675-6ba8-af6b-1a09ae128a66}">
           <p14:sldIdLst>
             <p14:sldId id="267"/>
           </p14:sldIdLst>
         </p14:section>
-        <p14:section name="보충" id="{ff3a808d-be7a-6d49-3982-db65424900c5}">
+        <p14:section name="보충" id="{f8b1e151-4f8a-8e90-5119-06d8d7eadc8c}">
           <p14:sldIdLst>
             <p14:sldId id="268"/>
           </p14:sldIdLst>
@@ -7873,7 +7873,7 @@
         </p:nvSpPr>
         <p:spPr>
           <a:xfrm>
-            <a:off x="548640" y="3424428"/>
+            <a:off x="548640" y="3202940"/>
             <a:ext cx="548640" cy="548640"/>
           </a:xfrm>
           <a:prstGeom prst="ellipse">
@@ -7918,7 +7918,7 @@
         </p:nvSpPr>
         <p:spPr>
           <a:xfrm>
-            <a:off x="1325880" y="3424428"/>
+            <a:off x="1325880" y="3202940"/>
             <a:ext cx="4049420" cy="548640"/>
           </a:xfrm>
           <a:prstGeom prst="rect">
@@ -7957,7 +7957,7 @@
         </p:nvSpPr>
         <p:spPr>
           <a:xfrm>
-            <a:off x="548640" y="4137660"/>
+            <a:off x="548640" y="3961892"/>
             <a:ext cx="548640" cy="548640"/>
           </a:xfrm>
           <a:prstGeom prst="ellipse">
@@ -8002,8 +8002,8 @@
         </p:nvSpPr>
         <p:spPr>
           <a:xfrm>
-            <a:off x="1325880" y="4137660"/>
-            <a:ext cx="4049420" cy="548640"/>
+            <a:off x="1325880" y="3916172"/>
+            <a:ext cx="4049420" cy="991616"/>
           </a:xfrm>
           <a:prstGeom prst="rect">
             <a:avLst/>
@@ -8041,7 +8041,7 @@
         </p:nvSpPr>
         <p:spPr>
           <a:xfrm>
-            <a:off x="548640" y="4850892"/>
+            <a:off x="548640" y="5072380"/>
             <a:ext cx="548640" cy="548640"/>
           </a:xfrm>
           <a:prstGeom prst="ellipse">
@@ -8086,7 +8086,7 @@
         </p:nvSpPr>
         <p:spPr>
           <a:xfrm>
-            <a:off x="1325880" y="4850892"/>
+            <a:off x="1325880" y="5072380"/>
             <a:ext cx="4049420" cy="548640"/>
           </a:xfrm>
           <a:prstGeom prst="rect">
